--- a/Topic_C/Exam_Practice/TC-L06_Speaking_Workshop_Digital_World_Communication.pptx
+++ b/Topic_C/Exam_Practice/TC-L06_Speaking_Workshop_Digital_World_Communication.pptx
@@ -615,7 +615,11 @@
           <a:lstStyle/>
           <a:p>
             <a:r>
-              <a:rPr lang="en-US" dirty="0"/>
+              <a:rPr lang="ar-SA" dirty="0">
+                <a:latin typeface="Amiri" pitchFamily="2" charset="-78"/>
+                <a:ea typeface="Amiri" pitchFamily="2" charset="-78"/>
+                <a:cs typeface="Amiri" pitchFamily="2" charset="-78"/>
+              </a:rPr>
               <a:t>ROLE PLAY C (Develop) — online learning.
 SET-UP IN THE BREAKOUT ROOM: A = examiner (reads the left column ONLY — the questions, in order), B = candidate (sees the task column; Core may use the help column), C = observer (ticks the feedback checklist). 1 minute preparation, about 3 minutes speaking, 1 minute feedback, then rotate.
 Task ! is the unexpected question: in the exam the candidate has not seen it — the examiner should read it without warning.
@@ -707,7 +711,11 @@
           <a:lstStyle/>
           <a:p>
             <a:r>
-              <a:rPr lang="en-US" dirty="0"/>
+              <a:rPr lang="ar-SA" dirty="0">
+                <a:latin typeface="Amiri" pitchFamily="2" charset="-78"/>
+                <a:ea typeface="Amiri" pitchFamily="2" charset="-78"/>
+                <a:cs typeface="Amiri" pitchFamily="2" charset="-78"/>
+              </a:rPr>
               <a:t>ROLE PLAY D (Stretch) — a radio phone-in.
 SET-UP IN THE BREAKOUT ROOM: A = examiner (reads the left column ONLY — the questions, in order), B = candidate (sees the task column; Core may use the help column), C = observer (ticks the feedback checklist). 1 minute preparation, about 3 minutes speaking, 1 minute feedback, then rotate.
 Task ! is the unexpected question: in the exam the candidate has not seen it — the examiner should read it without warning.
@@ -1243,7 +1251,11 @@
           <a:lstStyle/>
           <a:p>
             <a:r>
-              <a:rPr lang="en-US" dirty="0"/>
+              <a:rPr lang="ar-SA" dirty="0">
+                <a:latin typeface="Amiri" pitchFamily="2" charset="-78"/>
+                <a:ea typeface="Amiri" pitchFamily="2" charset="-78"/>
+                <a:cs typeface="Amiri" pitchFamily="2" charset="-78"/>
+              </a:rPr>
               <a:t>TOPIC CONVERSATION — Core. Examiner asks the questions in order and may add “لِمَاذَا؟ / هَلْ يُمْكِنُ أَنْ تَشْرَحَ أَكْثَرَ؟” to push for more. Candidate aims for one full sentence per question.
 </a:t>
             </a:r>
@@ -1332,7 +1344,11 @@
           <a:lstStyle/>
           <a:p>
             <a:r>
-              <a:rPr lang="en-US" dirty="0"/>
+              <a:rPr lang="ar-SA" dirty="0">
+                <a:latin typeface="Amiri" pitchFamily="2" charset="-78"/>
+                <a:ea typeface="Amiri" pitchFamily="2" charset="-78"/>
+                <a:cs typeface="Amiri" pitchFamily="2" charset="-78"/>
+              </a:rPr>
               <a:t>TOPIC CONVERSATION — Develop. Examiner asks the questions in order and may add “لِمَاذَا؟ / هَلْ يُمْكِنُ أَنْ تَشْرَحَ أَكْثَرَ؟” to push for more. Candidate aims for two or three sentences, with a reason and a past detail.
 </a:t>
             </a:r>
@@ -1421,7 +1437,11 @@
           <a:lstStyle/>
           <a:p>
             <a:r>
-              <a:rPr lang="en-US" dirty="0"/>
+              <a:rPr lang="ar-SA" dirty="0">
+                <a:latin typeface="Amiri" pitchFamily="2" charset="-78"/>
+                <a:ea typeface="Amiri" pitchFamily="2" charset="-78"/>
+                <a:cs typeface="Amiri" pitchFamily="2" charset="-78"/>
+              </a:rPr>
               <a:t>TOPIC CONVERSATION — Stretch. Examiner asks the questions in order and may add “لِمَاذَا؟ / هَلْ يُمْكِنُ أَنْ تَشْرَحَ أَكْثَرَ؟” to push for more. Candidate aims for a developed answer: opinion, balance, concession and a conditional.
 </a:t>
             </a:r>
@@ -1510,7 +1530,11 @@
           <a:lstStyle/>
           <a:p>
             <a:r>
-              <a:rPr lang="en-US" dirty="0"/>
+              <a:rPr lang="ar-SA" dirty="0">
+                <a:latin typeface="Amiri" pitchFamily="2" charset="-78"/>
+                <a:ea typeface="Amiri" pitchFamily="2" charset="-78"/>
+                <a:cs typeface="Amiri" pitchFamily="2" charset="-78"/>
+              </a:rPr>
               <a:t>WELCOME (1 min) — while students join.
 • Greet each student by name as they arrive: السَّلَامُ عَلَيْكُمْ. Take the register (Pastoral Tracker: attendance 0/1).
 • 2-MINUTE CHECK-IN (SEND training): a private chat to any student who seemed unsettled last lesson — “Are you okay today? 👍 / 👎”.
@@ -2224,7 +2248,11 @@
           <a:lstStyle/>
           <a:p>
             <a:r>
-              <a:rPr lang="en-US" dirty="0"/>
+              <a:rPr lang="ar-SA" dirty="0">
+                <a:latin typeface="Amiri" pitchFamily="2" charset="-78"/>
+                <a:ea typeface="Amiri" pitchFamily="2" charset="-78"/>
+                <a:cs typeface="Amiri" pitchFamily="2" charset="-78"/>
+              </a:rPr>
               <a:t>TEACH (3 min). Role play = precise and complete; conversation = develop. Choral repetition of the repair phrases. To a girl: تُعِيدِي.</a:t>
             </a:r>
             <a:endParaRPr lang="en-US" dirty="0"/>
@@ -2312,7 +2340,11 @@
           <a:lstStyle/>
           <a:p>
             <a:r>
-              <a:rPr lang="en-US" dirty="0"/>
+              <a:rPr lang="ar-SA" dirty="0">
+                <a:latin typeface="Amiri" pitchFamily="2" charset="-78"/>
+                <a:ea typeface="Amiri" pitchFamily="2" charset="-78"/>
+                <a:cs typeface="Amiri" pitchFamily="2" charset="-78"/>
+              </a:rPr>
               <a:t>LANGUAGE BANK (2 min) — non-human plurals: تَطْبِيقَاتٌ مُفِيدَةٌ · هَوَاتِفُ ذَكِيَّةٌ. Verbal nouns turn verbs into topics: أَسْتَخْدِمُ → اسْتِخْدَامُ الهَاتِفِ · أَتَوَاصَلُ → التَّوَاصُلُ.</a:t>
             </a:r>
             <a:endParaRPr lang="en-US" dirty="0"/>
@@ -2400,7 +2432,11 @@
           <a:lstStyle/>
           <a:p>
             <a:r>
-              <a:rPr lang="en-US" dirty="0"/>
+              <a:rPr lang="ar-SA" dirty="0">
+                <a:latin typeface="Amiri" pitchFamily="2" charset="-78"/>
+                <a:ea typeface="Amiri" pitchFamily="2" charset="-78"/>
+                <a:cs typeface="Amiri" pitchFamily="2" charset="-78"/>
+              </a:rPr>
               <a:t>LANGUAGE BANK (2 min) — learn the verb WITH its preposition: أَتَوَاصَلُ مَعَ · أَتَفَاعَلُ مَعَ · أُعَلِّقُ عَلَى · أَبْحَثُ عَنْ · أَحْصُلُ عَلَى · أَعْتَمِدُ عَلَى.</a:t>
             </a:r>
             <a:endParaRPr lang="en-US" dirty="0"/>
@@ -2576,7 +2612,11 @@
           <a:lstStyle/>
           <a:p>
             <a:r>
-              <a:rPr lang="en-US" dirty="0"/>
+              <a:rPr lang="ar-SA" dirty="0">
+                <a:latin typeface="Amiri" pitchFamily="2" charset="-78"/>
+                <a:ea typeface="Amiri" pitchFamily="2" charset="-78"/>
+                <a:cs typeface="Amiri" pitchFamily="2" charset="-78"/>
+              </a:rPr>
               <a:t>ROLE PLAY A (Core) — a phone shop.
 SET-UP IN THE BREAKOUT ROOM: A = examiner (reads the left column ONLY — the questions, in order), B = candidate (sees the task column; Core may use the help column), C = observer (ticks the feedback checklist). 1 minute preparation, about 3 minutes speaking, 1 minute feedback, then rotate.
 Task ! is the unexpected question: in the exam the candidate has not seen it — the examiner should read it without warning.
@@ -2668,7 +2708,11 @@
           <a:lstStyle/>
           <a:p>
             <a:r>
-              <a:rPr lang="en-US" dirty="0"/>
+              <a:rPr lang="ar-SA" dirty="0">
+                <a:latin typeface="Amiri" pitchFamily="2" charset="-78"/>
+                <a:ea typeface="Amiri" pitchFamily="2" charset="-78"/>
+                <a:cs typeface="Amiri" pitchFamily="2" charset="-78"/>
+              </a:rPr>
               <a:t>ROLE PLAY B (Core+) — a family rule.
 SET-UP IN THE BREAKOUT ROOM: A = examiner (reads the left column ONLY — the questions, in order), B = candidate (sees the task column; Core may use the help column), C = observer (ticks the feedback checklist). 1 minute preparation, about 3 minutes speaking, 1 minute feedback, then rotate.
 Task ! is the unexpected question: in the exam the candidate has not seen it — the examiner should read it without warning.
@@ -3156,6 +3200,7 @@
                   <a:srgbClr val="D4AF37"/>
                 </a:solidFill>
                 <a:latin typeface="Amiri" pitchFamily="2" charset="-78"/>
+                <a:ea typeface="Amiri" pitchFamily="2" charset="-78"/>
                 <a:cs typeface="Amiri" pitchFamily="2" charset="-78"/>
               </a:rPr>
               <a:t>م</a:t>
@@ -3362,6 +3407,7 @@
                   <a:srgbClr val="D4AF37"/>
                 </a:solidFill>
                 <a:latin typeface="Amiri" pitchFamily="2" charset="-78"/>
+                <a:ea typeface="Amiri" pitchFamily="2" charset="-78"/>
                 <a:cs typeface="Amiri" pitchFamily="2" charset="-78"/>
               </a:rPr>
               <a:t>وَرْشَةُ التَّحَدُّثِ — العَالَمُ الرَّقْمِيُّ</a:t>
@@ -3413,6 +3459,7 @@
                   <a:srgbClr val="C6D2E6"/>
                 </a:solidFill>
                 <a:latin typeface="Amiri" pitchFamily="2" charset="-78"/>
+                <a:ea typeface="Amiri" pitchFamily="2" charset="-78"/>
                 <a:cs typeface="Amiri" pitchFamily="2" charset="-78"/>
               </a:rPr>
               <a:t>أَتَوَاصَلُ مَعَ</a:t>
@@ -3439,6 +3486,7 @@
                   <a:srgbClr val="C6D2E6"/>
                 </a:solidFill>
                 <a:latin typeface="Amiri" pitchFamily="2" charset="-78"/>
+                <a:ea typeface="Amiri" pitchFamily="2" charset="-78"/>
                 <a:cs typeface="Amiri" pitchFamily="2" charset="-78"/>
               </a:rPr>
               <a:t>أُعَلِّقُ عَلَى</a:t>
@@ -3465,6 +3513,7 @@
                   <a:srgbClr val="C6D2E6"/>
                 </a:solidFill>
                 <a:latin typeface="Amiri" pitchFamily="2" charset="-78"/>
+                <a:ea typeface="Amiri" pitchFamily="2" charset="-78"/>
                 <a:cs typeface="Amiri" pitchFamily="2" charset="-78"/>
               </a:rPr>
               <a:t>مِنْ نَاحِيَةٍ … وَمِنْ نَاحِيَةٍ أُخْرَى</a:t>
@@ -3897,6 +3946,7 @@
                   <a:srgbClr val="D4AF37"/>
                 </a:solidFill>
                 <a:latin typeface="Amiri" pitchFamily="2" charset="-78"/>
+                <a:ea typeface="Amiri" pitchFamily="2" charset="-78"/>
                 <a:cs typeface="Amiri" pitchFamily="2" charset="-78"/>
               </a:rPr>
               <a:t>م</a:t>
@@ -4217,6 +4267,7 @@
                   <a:srgbClr val="8A6D1E"/>
                 </a:solidFill>
                 <a:latin typeface="Amiri" pitchFamily="2" charset="-78"/>
+                <a:ea typeface="Amiri" pitchFamily="2" charset="-78"/>
                 <a:cs typeface="Amiri" pitchFamily="2" charset="-78"/>
               </a:rPr>
               <a:t>التَّعَلُّمُ عَنْ بُعْدٍ</a:t>
@@ -4497,6 +4548,7 @@
                   <a:srgbClr val="1B3B6F"/>
                 </a:solidFill>
                 <a:latin typeface="Amiri" pitchFamily="2" charset="-78"/>
+                <a:ea typeface="Amiri" pitchFamily="2" charset="-78"/>
                 <a:cs typeface="Amiri" pitchFamily="2" charset="-78"/>
               </a:rPr>
               <a:t>أَدْرُسُ … مُنْذُ … عَنْ طَرِيقِ …</a:t>
@@ -4573,6 +4625,7 @@
                   <a:srgbClr val="1B3B6F"/>
                 </a:solidFill>
                 <a:latin typeface="Amiri" pitchFamily="2" charset="-78"/>
+                <a:ea typeface="Amiri" pitchFamily="2" charset="-78"/>
                 <a:cs typeface="Amiri" pitchFamily="2" charset="-78"/>
               </a:rPr>
               <a:t>مُنْذُ مَتَى تَدْرُسُ عَلَى الإِنْتَرْنِتِ؟</a:t>
@@ -4676,6 +4729,7 @@
                   <a:srgbClr val="1B3B6F"/>
                 </a:solidFill>
                 <a:latin typeface="Amiri" pitchFamily="2" charset="-78"/>
+                <a:ea typeface="Amiri" pitchFamily="2" charset="-78"/>
                 <a:cs typeface="Amiri" pitchFamily="2" charset="-78"/>
               </a:rPr>
               <a:t>أَتَفَاعَلُ مَعَ … عَنْ طَرِيقِ …</a:t>
@@ -4752,6 +4806,7 @@
                   <a:srgbClr val="1B3B6F"/>
                 </a:solidFill>
                 <a:latin typeface="Amiri" pitchFamily="2" charset="-78"/>
+                <a:ea typeface="Amiri" pitchFamily="2" charset="-78"/>
                 <a:cs typeface="Amiri" pitchFamily="2" charset="-78"/>
               </a:rPr>
               <a:t>كَيْفَ تَتَفَاعَلُ مَعَ المُعَلِّمِ وَالطُّلَّابِ؟</a:t>
@@ -4855,6 +4910,7 @@
                   <a:srgbClr val="1B3B6F"/>
                 </a:solidFill>
                 <a:latin typeface="Amiri" pitchFamily="2" charset="-78"/>
+                <a:ea typeface="Amiri" pitchFamily="2" charset="-78"/>
                 <a:cs typeface="Amiri" pitchFamily="2" charset="-78"/>
               </a:rPr>
               <a:t>أَكْبَرُ فَائِدَةٍ … فَمَثَلًا …</a:t>
@@ -4931,6 +4987,7 @@
                   <a:srgbClr val="1B3B6F"/>
                 </a:solidFill>
                 <a:latin typeface="Amiri" pitchFamily="2" charset="-78"/>
+                <a:ea typeface="Amiri" pitchFamily="2" charset="-78"/>
                 <a:cs typeface="Amiri" pitchFamily="2" charset="-78"/>
               </a:rPr>
               <a:t>مَا أَكْبَرُ فَائِدَةٍ؟</a:t>
@@ -5034,6 +5091,7 @@
                   <a:srgbClr val="1B3B6F"/>
                 </a:solidFill>
                 <a:latin typeface="Amiri" pitchFamily="2" charset="-78"/>
+                <a:ea typeface="Amiri" pitchFamily="2" charset="-78"/>
                 <a:cs typeface="Amiri" pitchFamily="2" charset="-78"/>
               </a:rPr>
               <a:t>فِي البِدَايَةِ … لٰكِنْ …</a:t>
@@ -5110,6 +5168,7 @@
                   <a:srgbClr val="1B3B6F"/>
                 </a:solidFill>
                 <a:latin typeface="Amiri" pitchFamily="2" charset="-78"/>
+                <a:ea typeface="Amiri" pitchFamily="2" charset="-78"/>
                 <a:cs typeface="Amiri" pitchFamily="2" charset="-78"/>
               </a:rPr>
               <a:t>وَهَلْ هُنَاكَ صُعُوبَاتٌ؟</a:t>
@@ -5213,6 +5272,7 @@
                   <a:srgbClr val="1B3B6F"/>
                 </a:solidFill>
                 <a:latin typeface="Amiri" pitchFamily="2" charset="-78"/>
+                <a:ea typeface="Amiri" pitchFamily="2" charset="-78"/>
                 <a:cs typeface="Amiri" pitchFamily="2" charset="-78"/>
               </a:rPr>
               <a:t>لَا / نَعَمْ، سَأَدْرُسُ … لِأَنَّ …</a:t>
@@ -5289,6 +5349,7 @@
                   <a:srgbClr val="1B3B6F"/>
                 </a:solidFill>
                 <a:latin typeface="Amiri" pitchFamily="2" charset="-78"/>
+                <a:ea typeface="Amiri" pitchFamily="2" charset="-78"/>
                 <a:cs typeface="Amiri" pitchFamily="2" charset="-78"/>
               </a:rPr>
               <a:t>هَلْ سَتَدْرُسُ فِي الجَامِعَةِ عَلَى الإِنْتَرْنِتِ أَيْضًا؟</a:t>
@@ -5498,6 +5559,7 @@
                   <a:srgbClr val="D4AF37"/>
                 </a:solidFill>
                 <a:latin typeface="Amiri" pitchFamily="2" charset="-78"/>
+                <a:ea typeface="Amiri" pitchFamily="2" charset="-78"/>
                 <a:cs typeface="Amiri" pitchFamily="2" charset="-78"/>
               </a:rPr>
               <a:t>م</a:t>
@@ -5818,6 +5880,7 @@
                   <a:srgbClr val="8A6D1E"/>
                 </a:solidFill>
                 <a:latin typeface="Amiri" pitchFamily="2" charset="-78"/>
+                <a:ea typeface="Amiri" pitchFamily="2" charset="-78"/>
                 <a:cs typeface="Amiri" pitchFamily="2" charset="-78"/>
               </a:rPr>
               <a:t>وَسَائِلُ التَّوَاصُلِ وَالمُرَاهِقُونَ</a:t>
@@ -6098,6 +6161,7 @@
                   <a:srgbClr val="1B3B6F"/>
                 </a:solidFill>
                 <a:latin typeface="Amiri" pitchFamily="2" charset="-78"/>
+                <a:ea typeface="Amiri" pitchFamily="2" charset="-78"/>
                 <a:cs typeface="Amiri" pitchFamily="2" charset="-78"/>
               </a:rPr>
               <a:t>مِنْ نَاحِيَةٍ … وَمِنْ نَاحِيَةٍ أُخْرَى …</a:t>
@@ -6177,6 +6241,7 @@
                   <a:srgbClr val="1B3B6F"/>
                 </a:solidFill>
                 <a:latin typeface="Amiri" pitchFamily="2" charset="-78"/>
+                <a:ea typeface="Amiri" pitchFamily="2" charset="-78"/>
                 <a:cs typeface="Amiri" pitchFamily="2" charset="-78"/>
               </a:rPr>
               <a:t>تَقْتَرِحُ الحُكُومَةُ مَنْعَ وَسَائِلِ التَّوَاصُلِ عَمَّنْ هُمْ دُونَ السَّادِسَةَ عَشْرَةَ. مَا رَأْيُكَ؟</a:t>
@@ -6280,6 +6345,7 @@
                   <a:srgbClr val="1B3B6F"/>
                 </a:solidFill>
                 <a:latin typeface="Amiri" pitchFamily="2" charset="-78"/>
+                <a:ea typeface="Amiri" pitchFamily="2" charset="-78"/>
                 <a:cs typeface="Amiri" pitchFamily="2" charset="-78"/>
               </a:rPr>
               <a:t>نَعَمْ، مَرَّةً … فَحَظَرْتُهُ …</a:t>
@@ -6356,6 +6422,7 @@
                   <a:srgbClr val="1B3B6F"/>
                 </a:solidFill>
                 <a:latin typeface="Amiri" pitchFamily="2" charset="-78"/>
+                <a:ea typeface="Amiri" pitchFamily="2" charset="-78"/>
                 <a:cs typeface="Amiri" pitchFamily="2" charset="-78"/>
               </a:rPr>
               <a:t>هَلْ تَعَرَّضْتَ أَنْتَ لِمَوْقِفٍ سَيِّئٍ؟</a:t>
@@ -6459,6 +6526,7 @@
                   <a:srgbClr val="1B3B6F"/>
                 </a:solidFill>
                 <a:latin typeface="Amiri" pitchFamily="2" charset="-78"/>
+                <a:ea typeface="Amiri" pitchFamily="2" charset="-78"/>
                 <a:cs typeface="Amiri" pitchFamily="2" charset="-78"/>
               </a:rPr>
               <a:t>صَحِيحٌ أَنَّ … غَيْرَ أَنَّ …</a:t>
@@ -6535,6 +6603,7 @@
                   <a:srgbClr val="1B3B6F"/>
                 </a:solidFill>
                 <a:latin typeface="Amiri" pitchFamily="2" charset="-78"/>
+                <a:ea typeface="Amiri" pitchFamily="2" charset="-78"/>
                 <a:cs typeface="Amiri" pitchFamily="2" charset="-78"/>
               </a:rPr>
               <a:t>أَلَيْسَ المَنْعُ أَسْهَلَ؟</a:t>
@@ -6638,6 +6707,7 @@
                   <a:srgbClr val="1B3B6F"/>
                 </a:solidFill>
                 <a:latin typeface="Amiri" pitchFamily="2" charset="-78"/>
+                <a:ea typeface="Amiri" pitchFamily="2" charset="-78"/>
                 <a:cs typeface="Amiri" pitchFamily="2" charset="-78"/>
               </a:rPr>
               <a:t>يَجِبُ عَلَى … أَنْ … وَعَلَى … أَنْ …</a:t>
@@ -6714,6 +6784,7 @@
                   <a:srgbClr val="1B3B6F"/>
                 </a:solidFill>
                 <a:latin typeface="Amiri" pitchFamily="2" charset="-78"/>
+                <a:ea typeface="Amiri" pitchFamily="2" charset="-78"/>
                 <a:cs typeface="Amiri" pitchFamily="2" charset="-78"/>
               </a:rPr>
               <a:t>إِذَنْ مَا البَدِيلُ؟</a:t>
@@ -6817,6 +6888,7 @@
                   <a:srgbClr val="1B3B6F"/>
                 </a:solidFill>
                 <a:latin typeface="Amiri" pitchFamily="2" charset="-78"/>
+                <a:ea typeface="Amiri" pitchFamily="2" charset="-78"/>
                 <a:cs typeface="Amiri" pitchFamily="2" charset="-78"/>
               </a:rPr>
               <a:t>لَوْ عِشْتُ …، لَقَرَأْتُ …</a:t>
@@ -6893,6 +6965,7 @@
                   <a:srgbClr val="1B3B6F"/>
                 </a:solidFill>
                 <a:latin typeface="Amiri" pitchFamily="2" charset="-78"/>
+                <a:ea typeface="Amiri" pitchFamily="2" charset="-78"/>
                 <a:cs typeface="Amiri" pitchFamily="2" charset="-78"/>
               </a:rPr>
               <a:t>لَوْ عِشْتَ بِلَا إِنْتَرْنِتٍ أُسْبُوعًا، كَيْفَ تَكُونُ حَيَاتُكَ؟</a:t>
@@ -7102,6 +7175,7 @@
                   <a:srgbClr val="D4AF37"/>
                 </a:solidFill>
                 <a:latin typeface="Amiri" pitchFamily="2" charset="-78"/>
+                <a:ea typeface="Amiri" pitchFamily="2" charset="-78"/>
                 <a:cs typeface="Amiri" pitchFamily="2" charset="-78"/>
               </a:rPr>
               <a:t>م</a:t>
@@ -7422,6 +7496,7 @@
                   <a:srgbClr val="8A6D1E"/>
                 </a:solidFill>
                 <a:latin typeface="Amiri" pitchFamily="2" charset="-78"/>
+                <a:ea typeface="Amiri" pitchFamily="2" charset="-78"/>
                 <a:cs typeface="Amiri" pitchFamily="2" charset="-78"/>
               </a:rPr>
               <a:t>وَرَقَةُ المُلَاحِظِ</a:t>
@@ -8892,6 +8967,7 @@
                   <a:srgbClr val="D4AF37"/>
                 </a:solidFill>
                 <a:latin typeface="Amiri" pitchFamily="2" charset="-78"/>
+                <a:ea typeface="Amiri" pitchFamily="2" charset="-78"/>
                 <a:cs typeface="Amiri" pitchFamily="2" charset="-78"/>
               </a:rPr>
               <a:t>م</a:t>
@@ -9212,6 +9288,7 @@
                   <a:srgbClr val="8A6D1E"/>
                 </a:solidFill>
                 <a:latin typeface="Amiri" pitchFamily="2" charset="-78"/>
+                <a:ea typeface="Amiri" pitchFamily="2" charset="-78"/>
                 <a:cs typeface="Amiri" pitchFamily="2" charset="-78"/>
               </a:rPr>
               <a:t>نَمُوذَجُ الإِجَابَةِ</a:t>
@@ -9454,6 +9531,7 @@
                   <a:srgbClr val="1B3B6F"/>
                 </a:solidFill>
                 <a:latin typeface="Amiri" pitchFamily="2" charset="-78"/>
+                <a:ea typeface="Amiri" pitchFamily="2" charset="-78"/>
                 <a:cs typeface="Amiri" pitchFamily="2" charset="-78"/>
               </a:rPr>
               <a:t>أُرِيدُ هَاتِفًا ذَكِيًّا جَدِيدًا.</a:t>
@@ -9530,6 +9608,7 @@
                   <a:srgbClr val="1B3B6F"/>
                 </a:solidFill>
                 <a:latin typeface="Amiri" pitchFamily="2" charset="-78"/>
+                <a:ea typeface="Amiri" pitchFamily="2" charset="-78"/>
                 <a:cs typeface="Amiri" pitchFamily="2" charset="-78"/>
               </a:rPr>
               <a:t>أَهْلًا! كَيْفَ أُسَاعِدُكَ؟</a:t>
@@ -9633,6 +9712,7 @@
                   <a:srgbClr val="1B3B6F"/>
                 </a:solidFill>
                 <a:latin typeface="Amiri" pitchFamily="2" charset="-78"/>
+                <a:ea typeface="Amiri" pitchFamily="2" charset="-78"/>
                 <a:cs typeface="Amiri" pitchFamily="2" charset="-78"/>
               </a:rPr>
               <a:t>أَسْتَخْدِمُهُ لِلتَّوَاصُلِ مَعَ أَصْدِقَائِي، وَلِلدِّرَاسَةِ.</a:t>
@@ -9709,6 +9789,7 @@
                   <a:srgbClr val="1B3B6F"/>
                 </a:solidFill>
                 <a:latin typeface="Amiri" pitchFamily="2" charset="-78"/>
+                <a:ea typeface="Amiri" pitchFamily="2" charset="-78"/>
                 <a:cs typeface="Amiri" pitchFamily="2" charset="-78"/>
               </a:rPr>
               <a:t>لِمَاذَا تَسْتَخْدِمُ الهَاتِفَ عَادَةً؟</a:t>
@@ -9812,6 +9893,7 @@
                   <a:srgbClr val="1B3B6F"/>
                 </a:solidFill>
                 <a:latin typeface="Amiri" pitchFamily="2" charset="-78"/>
+                <a:ea typeface="Amiri" pitchFamily="2" charset="-78"/>
                 <a:cs typeface="Amiri" pitchFamily="2" charset="-78"/>
               </a:rPr>
               <a:t>نَعَمْ، أَحْتَاجُ إِلَى كَامِيرَا جَيِّدَةٍ.</a:t>
@@ -9888,6 +9970,7 @@
                   <a:srgbClr val="1B3B6F"/>
                 </a:solidFill>
                 <a:latin typeface="Amiri" pitchFamily="2" charset="-78"/>
+                <a:ea typeface="Amiri" pitchFamily="2" charset="-78"/>
                 <a:cs typeface="Amiri" pitchFamily="2" charset="-78"/>
               </a:rPr>
               <a:t>هَلْ تُحِبُّ التَّصْوِيرَ؟</a:t>
@@ -9991,6 +10074,7 @@
                   <a:srgbClr val="1B3B6F"/>
                 </a:solidFill>
                 <a:latin typeface="Amiri" pitchFamily="2" charset="-78"/>
+                <a:ea typeface="Amiri" pitchFamily="2" charset="-78"/>
                 <a:cs typeface="Amiri" pitchFamily="2" charset="-78"/>
               </a:rPr>
               <a:t>كَمْ ثَمَنُهُ مِنْ فَضْلِكَ؟</a:t>
@@ -10067,6 +10151,7 @@
                   <a:srgbClr val="1B3B6F"/>
                 </a:solidFill>
                 <a:latin typeface="Amiri" pitchFamily="2" charset="-78"/>
+                <a:ea typeface="Amiri" pitchFamily="2" charset="-78"/>
                 <a:cs typeface="Amiri" pitchFamily="2" charset="-78"/>
               </a:rPr>
               <a:t>هٰذَا الهَاتِفُ مُمْتَازٌ.</a:t>
@@ -10170,6 +10255,7 @@
                   <a:srgbClr val="1B3B6F"/>
                 </a:solidFill>
                 <a:latin typeface="Amiri" pitchFamily="2" charset="-78"/>
+                <a:ea typeface="Amiri" pitchFamily="2" charset="-78"/>
                 <a:cs typeface="Amiri" pitchFamily="2" charset="-78"/>
               </a:rPr>
               <a:t>أَسْتَخْدِمُهُ ثَلَاثَ سَاعَاتٍ تَقْرِيبًا.</a:t>
@@ -10246,6 +10332,7 @@
                   <a:srgbClr val="1B3B6F"/>
                 </a:solidFill>
                 <a:latin typeface="Amiri" pitchFamily="2" charset="-78"/>
+                <a:ea typeface="Amiri" pitchFamily="2" charset="-78"/>
                 <a:cs typeface="Amiri" pitchFamily="2" charset="-78"/>
               </a:rPr>
               <a:t>كَمْ سَاعَةً تَسْتَخْدِمُ الهَاتِفَ كُلَّ يَوْمٍ؟</a:t>
@@ -10455,6 +10542,7 @@
                   <a:srgbClr val="D4AF37"/>
                 </a:solidFill>
                 <a:latin typeface="Amiri" pitchFamily="2" charset="-78"/>
+                <a:ea typeface="Amiri" pitchFamily="2" charset="-78"/>
                 <a:cs typeface="Amiri" pitchFamily="2" charset="-78"/>
               </a:rPr>
               <a:t>م</a:t>
@@ -10775,6 +10863,7 @@
                   <a:srgbClr val="8A6D1E"/>
                 </a:solidFill>
                 <a:latin typeface="Amiri" pitchFamily="2" charset="-78"/>
+                <a:ea typeface="Amiri" pitchFamily="2" charset="-78"/>
                 <a:cs typeface="Amiri" pitchFamily="2" charset="-78"/>
               </a:rPr>
               <a:t>نَمُوذَجُ الإِجَابَةِ</a:t>
@@ -11017,6 +11106,7 @@
                   <a:srgbClr val="1B3B6F"/>
                 </a:solidFill>
                 <a:latin typeface="Amiri" pitchFamily="2" charset="-78"/>
+                <a:ea typeface="Amiri" pitchFamily="2" charset="-78"/>
                 <a:cs typeface="Amiri" pitchFamily="2" charset="-78"/>
               </a:rPr>
               <a:t>أَتَوَاصَلُ مَعَ صَدِيقِي عَنِ الوَاجِبِ.</a:t>
@@ -11093,6 +11183,7 @@
                   <a:srgbClr val="1B3B6F"/>
                 </a:solidFill>
                 <a:latin typeface="Amiri" pitchFamily="2" charset="-78"/>
+                <a:ea typeface="Amiri" pitchFamily="2" charset="-78"/>
                 <a:cs typeface="Amiri" pitchFamily="2" charset="-78"/>
               </a:rPr>
               <a:t>لِمَاذَا تَنْظُرُ إِلَى هَاتِفِكَ طُولَ الوَقْتِ؟</a:t>
@@ -11196,6 +11287,7 @@
                   <a:srgbClr val="1B3B6F"/>
                 </a:solidFill>
                 <a:latin typeface="Amiri" pitchFamily="2" charset="-78"/>
+                <a:ea typeface="Amiri" pitchFamily="2" charset="-78"/>
                 <a:cs typeface="Amiri" pitchFamily="2" charset="-78"/>
               </a:rPr>
               <a:t>هٰذِهِ فِكْرَةٌ جَيِّدَةٌ، لِأَنَّنَا نَتَكَلَّمُ أَكْثَرَ.</a:t>
@@ -11272,6 +11364,7 @@
                   <a:srgbClr val="1B3B6F"/>
                 </a:solidFill>
                 <a:latin typeface="Amiri" pitchFamily="2" charset="-78"/>
+                <a:ea typeface="Amiri" pitchFamily="2" charset="-78"/>
                 <a:cs typeface="Amiri" pitchFamily="2" charset="-78"/>
               </a:rPr>
               <a:t>مِنَ اليَوْمِ: لَا هَوَاتِفَ عَلَى المَائِدَةِ!</a:t>
@@ -11375,6 +11468,7 @@
                   <a:srgbClr val="1B3B6F"/>
                 </a:solidFill>
                 <a:latin typeface="Amiri" pitchFamily="2" charset="-78"/>
+                <a:ea typeface="Amiri" pitchFamily="2" charset="-78"/>
                 <a:cs typeface="Amiri" pitchFamily="2" charset="-78"/>
               </a:rPr>
               <a:t>هَلْ يُمْكِنُ أَنْ أَسْتَخْدِمَهُ حَتَّى السَّاعَةِ التَّاسِعَةِ فَقَطْ؟</a:t>
@@ -11451,6 +11545,7 @@
                   <a:srgbClr val="1B3B6F"/>
                 </a:solidFill>
                 <a:latin typeface="Amiri" pitchFamily="2" charset="-78"/>
+                <a:ea typeface="Amiri" pitchFamily="2" charset="-78"/>
                 <a:cs typeface="Amiri" pitchFamily="2" charset="-78"/>
               </a:rPr>
               <a:t>وَأَنْتَ تَسْهَرُ عَلَى الهَاتِفِ أَيْضًا.</a:t>
@@ -11554,6 +11649,7 @@
                   <a:srgbClr val="1B3B6F"/>
                 </a:solidFill>
                 <a:latin typeface="Amiri" pitchFamily="2" charset="-78"/>
+                <a:ea typeface="Amiri" pitchFamily="2" charset="-78"/>
                 <a:cs typeface="Amiri" pitchFamily="2" charset="-78"/>
               </a:rPr>
               <a:t>لِمُرَاجَعَةِ الدُّرُوسِ عَلَى مِنَصَّةِ المَدْرَسَةِ، وَلِلتَّوَاصُلِ مَعَ مَجْمُوعَةِ المَشْرُوعِ.</a:t>
@@ -11630,6 +11726,7 @@
                   <a:srgbClr val="1B3B6F"/>
                 </a:solidFill>
                 <a:latin typeface="Amiri" pitchFamily="2" charset="-78"/>
+                <a:ea typeface="Amiri" pitchFamily="2" charset="-78"/>
                 <a:cs typeface="Amiri" pitchFamily="2" charset="-78"/>
               </a:rPr>
               <a:t>لِمَاذَا تَحْتَاجُ إِلَيْهِ فِي المَسَاءِ؟</a:t>
@@ -11733,6 +11830,7 @@
                   <a:srgbClr val="1B3B6F"/>
                 </a:solidFill>
                 <a:latin typeface="Amiri" pitchFamily="2" charset="-78"/>
+                <a:ea typeface="Amiri" pitchFamily="2" charset="-78"/>
                 <a:cs typeface="Amiri" pitchFamily="2" charset="-78"/>
               </a:rPr>
               <a:t>أَمْسِ شَاهَدْتُ دَرْسًا فِي الرِّيَاضِيَّاتِ، وَعَلَّقْتُ عَلَى صُوَرِ ابْنِ عَمِّي.</a:t>
@@ -11809,6 +11907,7 @@
                   <a:srgbClr val="1B3B6F"/>
                 </a:solidFill>
                 <a:latin typeface="Amiri" pitchFamily="2" charset="-78"/>
+                <a:ea typeface="Amiri" pitchFamily="2" charset="-78"/>
                 <a:cs typeface="Amiri" pitchFamily="2" charset="-78"/>
               </a:rPr>
               <a:t>مَاذَا فَعَلْتَ عَلَى الهَاتِفِ أَمْسِ؟</a:t>
@@ -12018,6 +12117,7 @@
                   <a:srgbClr val="D4AF37"/>
                 </a:solidFill>
                 <a:latin typeface="Amiri" pitchFamily="2" charset="-78"/>
+                <a:ea typeface="Amiri" pitchFamily="2" charset="-78"/>
                 <a:cs typeface="Amiri" pitchFamily="2" charset="-78"/>
               </a:rPr>
               <a:t>م</a:t>
@@ -12338,6 +12438,7 @@
                   <a:srgbClr val="8A6D1E"/>
                 </a:solidFill>
                 <a:latin typeface="Amiri" pitchFamily="2" charset="-78"/>
+                <a:ea typeface="Amiri" pitchFamily="2" charset="-78"/>
                 <a:cs typeface="Amiri" pitchFamily="2" charset="-78"/>
               </a:rPr>
               <a:t>نَمُوذَجُ الإِجَابَةِ</a:t>
@@ -12580,6 +12681,7 @@
                   <a:srgbClr val="1B3B6F"/>
                 </a:solidFill>
                 <a:latin typeface="Amiri" pitchFamily="2" charset="-78"/>
+                <a:ea typeface="Amiri" pitchFamily="2" charset="-78"/>
                 <a:cs typeface="Amiri" pitchFamily="2" charset="-78"/>
               </a:rPr>
               <a:t>أَدْرُسُ فِي مَدْرَسَةٍ إِلِكْتْرُونِيَّةٍ مُنْذُ سَنَتَيْنِ، عَنْ طَرِيقِ دُرُوسٍ مُبَاشِرَةٍ.</a:t>
@@ -12656,6 +12758,7 @@
                   <a:srgbClr val="1B3B6F"/>
                 </a:solidFill>
                 <a:latin typeface="Amiri" pitchFamily="2" charset="-78"/>
+                <a:ea typeface="Amiri" pitchFamily="2" charset="-78"/>
                 <a:cs typeface="Amiri" pitchFamily="2" charset="-78"/>
               </a:rPr>
               <a:t>مُنْذُ مَتَى تَدْرُسُ عَلَى الإِنْتَرْنِتِ؟</a:t>
@@ -12759,6 +12862,7 @@
                   <a:srgbClr val="1B3B6F"/>
                 </a:solidFill>
                 <a:latin typeface="Amiri" pitchFamily="2" charset="-78"/>
+                <a:ea typeface="Amiri" pitchFamily="2" charset="-78"/>
                 <a:cs typeface="Amiri" pitchFamily="2" charset="-78"/>
               </a:rPr>
               <a:t>أَتَفَاعَلُ مَعَهُمْ عَنْ طَرِيقِ المُحَادَثَةِ وَالغُرَفِ الجَانِبِيَّةِ، وَأُشَارِكُ الشَّاشَةَ أَحْيَانًا.</a:t>
@@ -12835,6 +12939,7 @@
                   <a:srgbClr val="1B3B6F"/>
                 </a:solidFill>
                 <a:latin typeface="Amiri" pitchFamily="2" charset="-78"/>
+                <a:ea typeface="Amiri" pitchFamily="2" charset="-78"/>
                 <a:cs typeface="Amiri" pitchFamily="2" charset="-78"/>
               </a:rPr>
               <a:t>كَيْفَ تَتَفَاعَلُ مَعَ المُعَلِّمِ وَالطُّلَّابِ؟</a:t>
@@ -12938,6 +13043,7 @@
                   <a:srgbClr val="1B3B6F"/>
                 </a:solidFill>
                 <a:latin typeface="Amiri" pitchFamily="2" charset="-78"/>
+                <a:ea typeface="Amiri" pitchFamily="2" charset="-78"/>
                 <a:cs typeface="Amiri" pitchFamily="2" charset="-78"/>
               </a:rPr>
               <a:t>أَكْبَرُ فَائِدَةٍ هِيَ المُرُونَةُ؛ فَمَثَلًا أَسْتَطِيعُ أَنْ أُشَاهِدَ الدَّرْسَ مَرَّةً ثَانِيَةً إِذَا لَمْ أَفْهَمْ.</a:t>
@@ -13014,6 +13120,7 @@
                   <a:srgbClr val="1B3B6F"/>
                 </a:solidFill>
                 <a:latin typeface="Amiri" pitchFamily="2" charset="-78"/>
+                <a:ea typeface="Amiri" pitchFamily="2" charset="-78"/>
                 <a:cs typeface="Amiri" pitchFamily="2" charset="-78"/>
               </a:rPr>
               <a:t>مَا أَكْبَرُ فَائِدَةٍ؟</a:t>
@@ -13117,6 +13224,7 @@
                   <a:srgbClr val="1B3B6F"/>
                 </a:solidFill>
                 <a:latin typeface="Amiri" pitchFamily="2" charset="-78"/>
+                <a:ea typeface="Amiri" pitchFamily="2" charset="-78"/>
                 <a:cs typeface="Amiri" pitchFamily="2" charset="-78"/>
               </a:rPr>
               <a:t>فِي البِدَايَةِ شَعَرْتُ بِالوَحْدَةِ، وَانْقَطَعَ الإِنْتَرْنِتُ مَرَّاتٍ، لٰكِنِّي تَعَوَّدْتُ بَعْدَ شَهْرٍ.</a:t>
@@ -13193,6 +13301,7 @@
                   <a:srgbClr val="1B3B6F"/>
                 </a:solidFill>
                 <a:latin typeface="Amiri" pitchFamily="2" charset="-78"/>
+                <a:ea typeface="Amiri" pitchFamily="2" charset="-78"/>
                 <a:cs typeface="Amiri" pitchFamily="2" charset="-78"/>
               </a:rPr>
               <a:t>وَهَلْ هُنَاكَ صُعُوبَاتٌ؟</a:t>
@@ -13296,6 +13405,7 @@
                   <a:srgbClr val="1B3B6F"/>
                 </a:solidFill>
                 <a:latin typeface="Amiri" pitchFamily="2" charset="-78"/>
+                <a:ea typeface="Amiri" pitchFamily="2" charset="-78"/>
                 <a:cs typeface="Amiri" pitchFamily="2" charset="-78"/>
               </a:rPr>
               <a:t>لَا، سَأَدْرُسُ فِي الجَامِعَةِ حُضُورِيًّا، لِأَنِّي أُرِيدُ أَنْ أَتَعَرَّفَ عَلَى أَصْدِقَاءَ جُدُدٍ.</a:t>
@@ -13372,6 +13482,7 @@
                   <a:srgbClr val="1B3B6F"/>
                 </a:solidFill>
                 <a:latin typeface="Amiri" pitchFamily="2" charset="-78"/>
+                <a:ea typeface="Amiri" pitchFamily="2" charset="-78"/>
                 <a:cs typeface="Amiri" pitchFamily="2" charset="-78"/>
               </a:rPr>
               <a:t>هَلْ سَتَدْرُسُ فِي الجَامِعَةِ عَلَى الإِنْتَرْنِتِ أَيْضًا؟</a:t>
@@ -13581,6 +13692,7 @@
                   <a:srgbClr val="D4AF37"/>
                 </a:solidFill>
                 <a:latin typeface="Amiri" pitchFamily="2" charset="-78"/>
+                <a:ea typeface="Amiri" pitchFamily="2" charset="-78"/>
                 <a:cs typeface="Amiri" pitchFamily="2" charset="-78"/>
               </a:rPr>
               <a:t>م</a:t>
@@ -13901,6 +14013,7 @@
                   <a:srgbClr val="8A6D1E"/>
                 </a:solidFill>
                 <a:latin typeface="Amiri" pitchFamily="2" charset="-78"/>
+                <a:ea typeface="Amiri" pitchFamily="2" charset="-78"/>
                 <a:cs typeface="Amiri" pitchFamily="2" charset="-78"/>
               </a:rPr>
               <a:t>نَمُوذَجُ الإِجَابَةِ</a:t>
@@ -14143,6 +14256,7 @@
                   <a:srgbClr val="1B3B6F"/>
                 </a:solidFill>
                 <a:latin typeface="Amiri" pitchFamily="2" charset="-78"/>
+                <a:ea typeface="Amiri" pitchFamily="2" charset="-78"/>
                 <a:cs typeface="Amiri" pitchFamily="2" charset="-78"/>
               </a:rPr>
               <a:t>مِنْ نَاحِيَةٍ، أَفْهَمُ القَلَقَ مِنَ الإِدْمَانِ وَالتَّنَمُّرِ، وَمِنْ نَاحِيَةٍ أُخْرَى، هِيَ وَسِيلَتُنَا لِلتَّعَلُّمِ وَالتَّعْبِيرِ عَنْ أَنْفُسِنَا.</a:t>
@@ -14222,6 +14336,7 @@
                   <a:srgbClr val="1B3B6F"/>
                 </a:solidFill>
                 <a:latin typeface="Amiri" pitchFamily="2" charset="-78"/>
+                <a:ea typeface="Amiri" pitchFamily="2" charset="-78"/>
                 <a:cs typeface="Amiri" pitchFamily="2" charset="-78"/>
               </a:rPr>
               <a:t>تَقْتَرِحُ الحُكُومَةُ مَنْعَ وَسَائِلِ التَّوَاصُلِ عَمَّنْ هُمْ دُونَ السَّادِسَةَ عَشْرَةَ. مَا رَأْيُكَ؟</a:t>
@@ -14325,6 +14440,7 @@
                   <a:srgbClr val="1B3B6F"/>
                 </a:solidFill>
                 <a:latin typeface="Amiri" pitchFamily="2" charset="-78"/>
+                <a:ea typeface="Amiri" pitchFamily="2" charset="-78"/>
                 <a:cs typeface="Amiri" pitchFamily="2" charset="-78"/>
               </a:rPr>
               <a:t>نَعَمْ، مَرَّةً كَتَبَ شَخْصٌ مَجْهُولٌ تَعْلِيقًا مُسِيئًا عَلَى صُورَتِي، فَحَظَرْتُهُ، وَأَخْبَرْتُ أُمِّي وَالمَدْرَسَةَ.</a:t>
@@ -14401,6 +14517,7 @@
                   <a:srgbClr val="1B3B6F"/>
                 </a:solidFill>
                 <a:latin typeface="Amiri" pitchFamily="2" charset="-78"/>
+                <a:ea typeface="Amiri" pitchFamily="2" charset="-78"/>
                 <a:cs typeface="Amiri" pitchFamily="2" charset="-78"/>
               </a:rPr>
               <a:t>هَلْ تَعَرَّضْتَ أَنْتَ لِمَوْقِفٍ سَيِّئٍ؟</a:t>
@@ -14504,6 +14621,7 @@
                   <a:srgbClr val="1B3B6F"/>
                 </a:solidFill>
                 <a:latin typeface="Amiri" pitchFamily="2" charset="-78"/>
+                <a:ea typeface="Amiri" pitchFamily="2" charset="-78"/>
                 <a:cs typeface="Amiri" pitchFamily="2" charset="-78"/>
               </a:rPr>
               <a:t>صَحِيحٌ أَنَّهُ أَسْهَلُ، غَيْرَ أَنَّ المُرَاهِقِينَ سَيَجِدُونَ طُرُقًا لِلالْتِفَافِ عَلَيْهِ، وَلَنْ يَتَعَلَّمُوا كَيْفَ يَحْمُونَ أَنْفُسَهُمْ.</a:t>
@@ -14580,6 +14698,7 @@
                   <a:srgbClr val="1B3B6F"/>
                 </a:solidFill>
                 <a:latin typeface="Amiri" pitchFamily="2" charset="-78"/>
+                <a:ea typeface="Amiri" pitchFamily="2" charset="-78"/>
                 <a:cs typeface="Amiri" pitchFamily="2" charset="-78"/>
               </a:rPr>
               <a:t>أَلَيْسَ المَنْعُ أَسْهَلَ؟</a:t>
@@ -14683,6 +14802,7 @@
                   <a:srgbClr val="1B3B6F"/>
                 </a:solidFill>
                 <a:latin typeface="Amiri" pitchFamily="2" charset="-78"/>
+                <a:ea typeface="Amiri" pitchFamily="2" charset="-78"/>
                 <a:cs typeface="Amiri" pitchFamily="2" charset="-78"/>
               </a:rPr>
               <a:t>يَجِبُ عَلَى المَدَارِسِ أَنْ تُعَلِّمَ الأَمَانَ الرَّقْمِيَّ، وَعَلَى الشَّرِكَاتِ أَنْ تَحْذِفَ التَّعْلِيقَاتِ المُسِيئَةَ بِسُرْعَةٍ.</a:t>
@@ -14759,6 +14879,7 @@
                   <a:srgbClr val="1B3B6F"/>
                 </a:solidFill>
                 <a:latin typeface="Amiri" pitchFamily="2" charset="-78"/>
+                <a:ea typeface="Amiri" pitchFamily="2" charset="-78"/>
                 <a:cs typeface="Amiri" pitchFamily="2" charset="-78"/>
               </a:rPr>
               <a:t>إِذَنْ مَا البَدِيلُ؟</a:t>
@@ -14862,6 +14983,7 @@
                   <a:srgbClr val="1B3B6F"/>
                 </a:solidFill>
                 <a:latin typeface="Amiri" pitchFamily="2" charset="-78"/>
+                <a:ea typeface="Amiri" pitchFamily="2" charset="-78"/>
                 <a:cs typeface="Amiri" pitchFamily="2" charset="-78"/>
               </a:rPr>
               <a:t>لَوْ عِشْتُ بِلَا إِنْتَرْنِتٍ أُسْبُوعًا، لَقَرَأْتُ أَكْثَرَ وَنِمْتُ أَفْضَلَ، لٰكِنِّي لَاشْتَقْتُ إِلَى أَصْدِقَائِي فِي الخَارِجِ.</a:t>
@@ -14938,6 +15060,7 @@
                   <a:srgbClr val="1B3B6F"/>
                 </a:solidFill>
                 <a:latin typeface="Amiri" pitchFamily="2" charset="-78"/>
+                <a:ea typeface="Amiri" pitchFamily="2" charset="-78"/>
                 <a:cs typeface="Amiri" pitchFamily="2" charset="-78"/>
               </a:rPr>
               <a:t>لَوْ عِشْتَ بِلَا إِنْتَرْنِتٍ أُسْبُوعًا، كَيْفَ تَكُونُ حَيَاتُكَ؟</a:t>
@@ -15147,6 +15270,7 @@
                   <a:srgbClr val="D4AF37"/>
                 </a:solidFill>
                 <a:latin typeface="Amiri" pitchFamily="2" charset="-78"/>
+                <a:ea typeface="Amiri" pitchFamily="2" charset="-78"/>
                 <a:cs typeface="Amiri" pitchFamily="2" charset="-78"/>
               </a:rPr>
               <a:t>م</a:t>
@@ -15467,6 +15591,7 @@
                   <a:srgbClr val="8A6D1E"/>
                 </a:solidFill>
                 <a:latin typeface="Amiri" pitchFamily="2" charset="-78"/>
+                <a:ea typeface="Amiri" pitchFamily="2" charset="-78"/>
                 <a:cs typeface="Amiri" pitchFamily="2" charset="-78"/>
               </a:rPr>
               <a:t>أَنَا وَالتِّكْنُولُوجْيَا</a:t>
@@ -15747,6 +15872,7 @@
                   <a:srgbClr val="1B3B6F"/>
                 </a:solidFill>
                 <a:latin typeface="Amiri" pitchFamily="2" charset="-78"/>
+                <a:ea typeface="Amiri" pitchFamily="2" charset="-78"/>
                 <a:cs typeface="Amiri" pitchFamily="2" charset="-78"/>
               </a:rPr>
               <a:t>نَعَمْ، عِنْدِي …</a:t>
@@ -15823,6 +15949,7 @@
                   <a:srgbClr val="1B3B6F"/>
                 </a:solidFill>
                 <a:latin typeface="Amiri" pitchFamily="2" charset="-78"/>
+                <a:ea typeface="Amiri" pitchFamily="2" charset="-78"/>
                 <a:cs typeface="Amiri" pitchFamily="2" charset="-78"/>
               </a:rPr>
               <a:t>هَلْ عِنْدَكَ هَاتِفٌ ذَكِيٌّ؟</a:t>
@@ -15991,6 +16118,7 @@
                   <a:srgbClr val="1B3B6F"/>
                 </a:solidFill>
                 <a:latin typeface="Amiri" pitchFamily="2" charset="-78"/>
+                <a:ea typeface="Amiri" pitchFamily="2" charset="-78"/>
                 <a:cs typeface="Amiri" pitchFamily="2" charset="-78"/>
               </a:rPr>
               <a:t>تَطْبِيقِي المُفَضَّلُ … لِأَنَّ …</a:t>
@@ -16067,6 +16195,7 @@
                   <a:srgbClr val="1B3B6F"/>
                 </a:solidFill>
                 <a:latin typeface="Amiri" pitchFamily="2" charset="-78"/>
+                <a:ea typeface="Amiri" pitchFamily="2" charset="-78"/>
                 <a:cs typeface="Amiri" pitchFamily="2" charset="-78"/>
               </a:rPr>
               <a:t>مَا تَطْبِيقُكَ المُفَضَّلُ؟</a:t>
@@ -16235,6 +16364,7 @@
                   <a:srgbClr val="1B3B6F"/>
                 </a:solidFill>
                 <a:latin typeface="Amiri" pitchFamily="2" charset="-78"/>
+                <a:ea typeface="Amiri" pitchFamily="2" charset="-78"/>
                 <a:cs typeface="Amiri" pitchFamily="2" charset="-78"/>
               </a:rPr>
               <a:t>أَتَوَاصَلُ مَعَ …</a:t>
@@ -16311,6 +16441,7 @@
                   <a:srgbClr val="1B3B6F"/>
                 </a:solidFill>
                 <a:latin typeface="Amiri" pitchFamily="2" charset="-78"/>
+                <a:ea typeface="Amiri" pitchFamily="2" charset="-78"/>
                 <a:cs typeface="Amiri" pitchFamily="2" charset="-78"/>
               </a:rPr>
               <a:t>مَعَ مَنْ تَتَوَاصَلُ عَلَى الإِنْتَرْنِتِ؟</a:t>
@@ -16479,6 +16610,7 @@
                   <a:srgbClr val="1B3B6F"/>
                 </a:solidFill>
                 <a:latin typeface="Amiri" pitchFamily="2" charset="-78"/>
+                <a:ea typeface="Amiri" pitchFamily="2" charset="-78"/>
                 <a:cs typeface="Amiri" pitchFamily="2" charset="-78"/>
               </a:rPr>
               <a:t>أَسْتَخْدِمُهَا …</a:t>
@@ -16555,6 +16687,7 @@
                   <a:srgbClr val="1B3B6F"/>
                 </a:solidFill>
                 <a:latin typeface="Amiri" pitchFamily="2" charset="-78"/>
+                <a:ea typeface="Amiri" pitchFamily="2" charset="-78"/>
                 <a:cs typeface="Amiri" pitchFamily="2" charset="-78"/>
               </a:rPr>
               <a:t>كَمْ سَاعَةً تَسْتَخْدِمُ الشَّاشَاتِ يَوْمِيًّا؟</a:t>
@@ -16723,6 +16856,7 @@
                   <a:srgbClr val="1B3B6F"/>
                 </a:solidFill>
                 <a:latin typeface="Amiri" pitchFamily="2" charset="-78"/>
+                <a:ea typeface="Amiri" pitchFamily="2" charset="-78"/>
                 <a:cs typeface="Amiri" pitchFamily="2" charset="-78"/>
               </a:rPr>
               <a:t>نَعَمْ / لَا، …</a:t>
@@ -16799,6 +16933,7 @@
                   <a:srgbClr val="1B3B6F"/>
                 </a:solidFill>
                 <a:latin typeface="Amiri" pitchFamily="2" charset="-78"/>
+                <a:ea typeface="Amiri" pitchFamily="2" charset="-78"/>
                 <a:cs typeface="Amiri" pitchFamily="2" charset="-78"/>
               </a:rPr>
               <a:t>هَلْ تَقْرَأُ الأَخْبَارَ عَلَى الإِنْتَرْنِتِ؟</a:t>
@@ -16953,6 +17088,7 @@
                   <a:srgbClr val="1B3B6F"/>
                 </a:solidFill>
                 <a:latin typeface="Amiri" pitchFamily="2" charset="-78"/>
+                <a:ea typeface="Amiri" pitchFamily="2" charset="-78"/>
                 <a:cs typeface="Amiri" pitchFamily="2" charset="-78"/>
               </a:rPr>
               <a:t>عَفْوًا، هَلْ يُمْكِنُ أَنْ تُعِيدَ السُّؤَالَ؟</a:t>
@@ -17086,6 +17222,7 @@
                   <a:srgbClr val="D4AF37"/>
                 </a:solidFill>
                 <a:latin typeface="Amiri" pitchFamily="2" charset="-78"/>
+                <a:ea typeface="Amiri" pitchFamily="2" charset="-78"/>
                 <a:cs typeface="Amiri" pitchFamily="2" charset="-78"/>
               </a:rPr>
               <a:t>م</a:t>
@@ -17406,6 +17543,7 @@
                   <a:srgbClr val="8A6D1E"/>
                 </a:solidFill>
                 <a:latin typeface="Amiri" pitchFamily="2" charset="-78"/>
+                <a:ea typeface="Amiri" pitchFamily="2" charset="-78"/>
                 <a:cs typeface="Amiri" pitchFamily="2" charset="-78"/>
               </a:rPr>
               <a:t>الحَيَاةُ الرَّقْمِيَّةُ</a:t>
@@ -17686,6 +17824,7 @@
                   <a:srgbClr val="1B3B6F"/>
                 </a:solidFill>
                 <a:latin typeface="Amiri" pitchFamily="2" charset="-78"/>
+                <a:ea typeface="Amiri" pitchFamily="2" charset="-78"/>
                 <a:cs typeface="Amiri" pitchFamily="2" charset="-78"/>
               </a:rPr>
               <a:t>أَبْحَثُ عَنْ … وَأُشَاهِدُ …</a:t>
@@ -17762,6 +17901,7 @@
                   <a:srgbClr val="1B3B6F"/>
                 </a:solidFill>
                 <a:latin typeface="Amiri" pitchFamily="2" charset="-78"/>
+                <a:ea typeface="Amiri" pitchFamily="2" charset="-78"/>
                 <a:cs typeface="Amiri" pitchFamily="2" charset="-78"/>
               </a:rPr>
               <a:t>كَيْفَ تَسْتَخْدِمُ الإِنْتَرْنِتَ فِي الدِّرَاسَةِ؟</a:t>
@@ -17865,6 +18005,7 @@
                   <a:srgbClr val="1B3B6F"/>
                 </a:solidFill>
                 <a:latin typeface="Amiri" pitchFamily="2" charset="-78"/>
+                <a:ea typeface="Amiri" pitchFamily="2" charset="-78"/>
                 <a:cs typeface="Amiri" pitchFamily="2" charset="-78"/>
               </a:rPr>
               <a:t>أَرَاهَا مُفِيدَةً لِلتَّوَاصُلِ … لٰكِنَّهَا …</a:t>
@@ -17941,6 +18082,7 @@
                   <a:srgbClr val="1B3B6F"/>
                 </a:solidFill>
                 <a:latin typeface="Amiri" pitchFamily="2" charset="-78"/>
+                <a:ea typeface="Amiri" pitchFamily="2" charset="-78"/>
                 <a:cs typeface="Amiri" pitchFamily="2" charset="-78"/>
               </a:rPr>
               <a:t>مَا رَأْيُكَ فِي وَسَائِلِ التَّوَاصُلِ الاجْتِمَاعِيِّ؟</a:t>
@@ -18044,6 +18186,7 @@
                   <a:srgbClr val="1B3B6F"/>
                 </a:solidFill>
                 <a:latin typeface="Amiri" pitchFamily="2" charset="-78"/>
+                <a:ea typeface="Amiri" pitchFamily="2" charset="-78"/>
                 <a:cs typeface="Amiri" pitchFamily="2" charset="-78"/>
               </a:rPr>
               <a:t>كَانُوا يَكْتُبُونَ … أَمَّا نَحْنُ …</a:t>
@@ -18120,6 +18263,7 @@
                   <a:srgbClr val="1B3B6F"/>
                 </a:solidFill>
                 <a:latin typeface="Amiri" pitchFamily="2" charset="-78"/>
+                <a:ea typeface="Amiri" pitchFamily="2" charset="-78"/>
                 <a:cs typeface="Amiri" pitchFamily="2" charset="-78"/>
               </a:rPr>
               <a:t>كَيْفَ كَانَ التَّوَاصُلُ فِي أَيَّامِ وَالِدَيْكَ؟</a:t>
@@ -18223,6 +18367,7 @@
                   <a:srgbClr val="1B3B6F"/>
                 </a:solidFill>
                 <a:latin typeface="Amiri" pitchFamily="2" charset="-78"/>
+                <a:ea typeface="Amiri" pitchFamily="2" charset="-78"/>
                 <a:cs typeface="Amiri" pitchFamily="2" charset="-78"/>
               </a:rPr>
               <a:t>لَا أَنْشُرُ … وَأَسْتَخْدِمُ …</a:t>
@@ -18299,6 +18444,7 @@
                   <a:srgbClr val="1B3B6F"/>
                 </a:solidFill>
                 <a:latin typeface="Amiri" pitchFamily="2" charset="-78"/>
+                <a:ea typeface="Amiri" pitchFamily="2" charset="-78"/>
                 <a:cs typeface="Amiri" pitchFamily="2" charset="-78"/>
               </a:rPr>
               <a:t>كَيْفَ تَحْمِي نَفْسَكَ عَلَى الإِنْتَرْنِتِ؟</a:t>
@@ -18402,6 +18548,7 @@
                   <a:srgbClr val="1B3B6F"/>
                 </a:solidFill>
                 <a:latin typeface="Amiri" pitchFamily="2" charset="-78"/>
+                <a:ea typeface="Amiri" pitchFamily="2" charset="-78"/>
                 <a:cs typeface="Amiri" pitchFamily="2" charset="-78"/>
               </a:rPr>
               <a:t>مَرَّةً … فَسَاعَدَنِي …</a:t>
@@ -18478,6 +18625,7 @@
                   <a:srgbClr val="1B3B6F"/>
                 </a:solidFill>
                 <a:latin typeface="Amiri" pitchFamily="2" charset="-78"/>
+                <a:ea typeface="Amiri" pitchFamily="2" charset="-78"/>
                 <a:cs typeface="Amiri" pitchFamily="2" charset="-78"/>
               </a:rPr>
               <a:t>صِفْ مَرَّةً سَاعَدَتْكَ فِيهَا التِّكْنُولُوجْيَا.</a:t>
@@ -18687,6 +18835,7 @@
                   <a:srgbClr val="D4AF37"/>
                 </a:solidFill>
                 <a:latin typeface="Amiri" pitchFamily="2" charset="-78"/>
+                <a:ea typeface="Amiri" pitchFamily="2" charset="-78"/>
                 <a:cs typeface="Amiri" pitchFamily="2" charset="-78"/>
               </a:rPr>
               <a:t>م</a:t>
@@ -19007,6 +19156,7 @@
                   <a:srgbClr val="8A6D1E"/>
                 </a:solidFill>
                 <a:latin typeface="Amiri" pitchFamily="2" charset="-78"/>
+                <a:ea typeface="Amiri" pitchFamily="2" charset="-78"/>
                 <a:cs typeface="Amiri" pitchFamily="2" charset="-78"/>
               </a:rPr>
               <a:t>التِّكْنُولُوجْيَا وَالمُجْتَمَعُ</a:t>
@@ -19287,6 +19437,7 @@
                   <a:srgbClr val="1B3B6F"/>
                 </a:solidFill>
                 <a:latin typeface="Amiri" pitchFamily="2" charset="-78"/>
+                <a:ea typeface="Amiri" pitchFamily="2" charset="-78"/>
                 <a:cs typeface="Amiri" pitchFamily="2" charset="-78"/>
               </a:rPr>
               <a:t>مِنْ نَاحِيَةٍ … وَمِنْ نَاحِيَةٍ أُخْرَى …</a:t>
@@ -19363,6 +19514,7 @@
                   <a:srgbClr val="1B3B6F"/>
                 </a:solidFill>
                 <a:latin typeface="Amiri" pitchFamily="2" charset="-78"/>
+                <a:ea typeface="Amiri" pitchFamily="2" charset="-78"/>
                 <a:cs typeface="Amiri" pitchFamily="2" charset="-78"/>
               </a:rPr>
               <a:t>هَلْ قَرَّبَتِ التِّكْنُولُوجْيَا بَيْنَ النَّاسِ أَمْ أَبْعَدَتْهُمْ؟</a:t>
@@ -19466,6 +19618,7 @@
                   <a:srgbClr val="1B3B6F"/>
                 </a:solidFill>
                 <a:latin typeface="Amiri" pitchFamily="2" charset="-78"/>
+                <a:ea typeface="Amiri" pitchFamily="2" charset="-78"/>
                 <a:cs typeface="Amiri" pitchFamily="2" charset="-78"/>
               </a:rPr>
               <a:t>أَرَى أَنَّهُ … لِأَنَّ …</a:t>
@@ -19542,6 +19695,7 @@
                   <a:srgbClr val="1B3B6F"/>
                 </a:solidFill>
                 <a:latin typeface="Amiri" pitchFamily="2" charset="-78"/>
+                <a:ea typeface="Amiri" pitchFamily="2" charset="-78"/>
                 <a:cs typeface="Amiri" pitchFamily="2" charset="-78"/>
               </a:rPr>
               <a:t>هَلْ يَجِبُ أَنْ تُمْنَعَ الهَوَاتِفُ فِي المَدَارِسِ؟</a:t>
@@ -19645,6 +19799,7 @@
                   <a:srgbClr val="1B3B6F"/>
                 </a:solidFill>
                 <a:latin typeface="Amiri" pitchFamily="2" charset="-78"/>
+                <a:ea typeface="Amiri" pitchFamily="2" charset="-78"/>
                 <a:cs typeface="Amiri" pitchFamily="2" charset="-78"/>
               </a:rPr>
               <a:t>أَتَأَكَّدُ مِنْ … وَأُقَارِنُ …</a:t>
@@ -19721,6 +19876,7 @@
                   <a:srgbClr val="1B3B6F"/>
                 </a:solidFill>
                 <a:latin typeface="Amiri" pitchFamily="2" charset="-78"/>
+                <a:ea typeface="Amiri" pitchFamily="2" charset="-78"/>
                 <a:cs typeface="Amiri" pitchFamily="2" charset="-78"/>
               </a:rPr>
               <a:t>كَيْفَ تَعْرِفُ أَنَّ المَعْلُومَةَ عَلَى الإِنْتَرْنِتِ صَحِيحَةٌ؟</a:t>
@@ -19824,6 +19980,7 @@
                   <a:srgbClr val="1B3B6F"/>
                 </a:solidFill>
                 <a:latin typeface="Amiri" pitchFamily="2" charset="-78"/>
+                <a:ea typeface="Amiri" pitchFamily="2" charset="-78"/>
                 <a:cs typeface="Amiri" pitchFamily="2" charset="-78"/>
               </a:rPr>
               <a:t>صَحِيحٌ أَنَّ … غَيْرَ أَنَّ …</a:t>
@@ -19900,6 +20057,7 @@
                   <a:srgbClr val="1B3B6F"/>
                 </a:solidFill>
                 <a:latin typeface="Amiri" pitchFamily="2" charset="-78"/>
+                <a:ea typeface="Amiri" pitchFamily="2" charset="-78"/>
                 <a:cs typeface="Amiri" pitchFamily="2" charset="-78"/>
               </a:rPr>
               <a:t>هَلِ الشَّبَابُ مُدْمِنُونَ عَلَى الشَّاشَاتِ؟</a:t>
@@ -20003,6 +20161,7 @@
                   <a:srgbClr val="1B3B6F"/>
                 </a:solidFill>
                 <a:latin typeface="Amiri" pitchFamily="2" charset="-78"/>
+                <a:ea typeface="Amiri" pitchFamily="2" charset="-78"/>
                 <a:cs typeface="Amiri" pitchFamily="2" charset="-78"/>
               </a:rPr>
               <a:t>مِنَ المُتَوَقَّعِ أَنْ … وَإِذَا لَمْ …، فَقَدْ …</a:t>
@@ -20079,6 +20238,7 @@
                   <a:srgbClr val="1B3B6F"/>
                 </a:solidFill>
                 <a:latin typeface="Amiri" pitchFamily="2" charset="-78"/>
+                <a:ea typeface="Amiri" pitchFamily="2" charset="-78"/>
                 <a:cs typeface="Amiri" pitchFamily="2" charset="-78"/>
               </a:rPr>
               <a:t>كَيْفَ سَيَكُونُ التَّوَاصُلُ بَعْدَ عِشْرِينَ سَنَةً؟</a:t>
@@ -20288,6 +20448,7 @@
                   <a:srgbClr val="D4AF37"/>
                 </a:solidFill>
                 <a:latin typeface="Amiri" pitchFamily="2" charset="-78"/>
+                <a:ea typeface="Amiri" pitchFamily="2" charset="-78"/>
                 <a:cs typeface="Amiri" pitchFamily="2" charset="-78"/>
               </a:rPr>
               <a:t>م</a:t>
@@ -20608,6 +20769,7 @@
                   <a:srgbClr val="8A6D1E"/>
                 </a:solidFill>
                 <a:latin typeface="Amiri" pitchFamily="2" charset="-78"/>
+                <a:ea typeface="Amiri" pitchFamily="2" charset="-78"/>
                 <a:cs typeface="Amiri" pitchFamily="2" charset="-78"/>
               </a:rPr>
               <a:t>آدَابُ الصَّفِّ</a:t>
@@ -22139,6 +22301,7 @@
                   <a:srgbClr val="D4AF37"/>
                 </a:solidFill>
                 <a:latin typeface="Amiri" pitchFamily="2" charset="-78"/>
+                <a:ea typeface="Amiri" pitchFamily="2" charset="-78"/>
                 <a:cs typeface="Amiri" pitchFamily="2" charset="-78"/>
               </a:rPr>
               <a:t>م</a:t>
@@ -22459,6 +22622,7 @@
                   <a:srgbClr val="8A6D1E"/>
                 </a:solidFill>
                 <a:latin typeface="Amiri" pitchFamily="2" charset="-78"/>
+                <a:ea typeface="Amiri" pitchFamily="2" charset="-78"/>
                 <a:cs typeface="Amiri" pitchFamily="2" charset="-78"/>
               </a:rPr>
               <a:t>نَمُوذَجُ الإِجَابَةِ</a:t>
@@ -22701,6 +22865,7 @@
                   <a:srgbClr val="1B3B6F"/>
                 </a:solidFill>
                 <a:latin typeface="Amiri" pitchFamily="2" charset="-78"/>
+                <a:ea typeface="Amiri" pitchFamily="2" charset="-78"/>
                 <a:cs typeface="Amiri" pitchFamily="2" charset="-78"/>
               </a:rPr>
               <a:t>نَعَمْ، عِنْدِي هَاتِفٌ ذَكِيٌّ وَحَاسُوبٌ مَحْمُولٌ.</a:t>
@@ -22777,6 +22942,7 @@
                   <a:srgbClr val="1B3B6F"/>
                 </a:solidFill>
                 <a:latin typeface="Amiri" pitchFamily="2" charset="-78"/>
+                <a:ea typeface="Amiri" pitchFamily="2" charset="-78"/>
                 <a:cs typeface="Amiri" pitchFamily="2" charset="-78"/>
               </a:rPr>
               <a:t>هَلْ عِنْدَكَ هَاتِفٌ ذَكِيٌّ؟</a:t>
@@ -22880,6 +23046,7 @@
                   <a:srgbClr val="1B3B6F"/>
                 </a:solidFill>
                 <a:latin typeface="Amiri" pitchFamily="2" charset="-78"/>
+                <a:ea typeface="Amiri" pitchFamily="2" charset="-78"/>
                 <a:cs typeface="Amiri" pitchFamily="2" charset="-78"/>
               </a:rPr>
               <a:t>تَطْبِيقِيَ المُفَضَّلُ تَطْبِيقُ خَرَائِطَ، لِأَنَّهُ مُفِيدٌ جِدًّا.</a:t>
@@ -22956,6 +23123,7 @@
                   <a:srgbClr val="1B3B6F"/>
                 </a:solidFill>
                 <a:latin typeface="Amiri" pitchFamily="2" charset="-78"/>
+                <a:ea typeface="Amiri" pitchFamily="2" charset="-78"/>
                 <a:cs typeface="Amiri" pitchFamily="2" charset="-78"/>
               </a:rPr>
               <a:t>مَا تَطْبِيقُكَ المُفَضَّلُ؟</a:t>
@@ -23059,6 +23227,7 @@
                   <a:srgbClr val="1B3B6F"/>
                 </a:solidFill>
                 <a:latin typeface="Amiri" pitchFamily="2" charset="-78"/>
+                <a:ea typeface="Amiri" pitchFamily="2" charset="-78"/>
                 <a:cs typeface="Amiri" pitchFamily="2" charset="-78"/>
               </a:rPr>
               <a:t>أَتَوَاصَلُ مَعَ أَصْدِقَائِي وَأَقَارِبِي فِي مِصْرَ.</a:t>
@@ -23135,6 +23304,7 @@
                   <a:srgbClr val="1B3B6F"/>
                 </a:solidFill>
                 <a:latin typeface="Amiri" pitchFamily="2" charset="-78"/>
+                <a:ea typeface="Amiri" pitchFamily="2" charset="-78"/>
                 <a:cs typeface="Amiri" pitchFamily="2" charset="-78"/>
               </a:rPr>
               <a:t>مَعَ مَنْ تَتَوَاصَلُ عَلَى الإِنْتَرْنِتِ؟</a:t>
@@ -23238,6 +23408,7 @@
                   <a:srgbClr val="1B3B6F"/>
                 </a:solidFill>
                 <a:latin typeface="Amiri" pitchFamily="2" charset="-78"/>
+                <a:ea typeface="Amiri" pitchFamily="2" charset="-78"/>
                 <a:cs typeface="Amiri" pitchFamily="2" charset="-78"/>
               </a:rPr>
               <a:t>أَسْتَخْدِمُهَا أَرْبَعَ سَاعَاتٍ تَقْرِيبًا، مَعَ الدِّرَاسَةِ.</a:t>
@@ -23314,6 +23485,7 @@
                   <a:srgbClr val="1B3B6F"/>
                 </a:solidFill>
                 <a:latin typeface="Amiri" pitchFamily="2" charset="-78"/>
+                <a:ea typeface="Amiri" pitchFamily="2" charset="-78"/>
                 <a:cs typeface="Amiri" pitchFamily="2" charset="-78"/>
               </a:rPr>
               <a:t>كَمْ سَاعَةً تَسْتَخْدِمُ الشَّاشَاتِ يَوْمِيًّا؟</a:t>
@@ -23417,6 +23589,7 @@
                   <a:srgbClr val="1B3B6F"/>
                 </a:solidFill>
                 <a:latin typeface="Amiri" pitchFamily="2" charset="-78"/>
+                <a:ea typeface="Amiri" pitchFamily="2" charset="-78"/>
                 <a:cs typeface="Amiri" pitchFamily="2" charset="-78"/>
               </a:rPr>
               <a:t>نَعَمْ، أَقْرَأُ الأَخْبَارَ عَلَى مَوْقِعٍ إِخْبَارِيٍّ كُلَّ صَبَاحٍ.</a:t>
@@ -23493,6 +23666,7 @@
                   <a:srgbClr val="1B3B6F"/>
                 </a:solidFill>
                 <a:latin typeface="Amiri" pitchFamily="2" charset="-78"/>
+                <a:ea typeface="Amiri" pitchFamily="2" charset="-78"/>
                 <a:cs typeface="Amiri" pitchFamily="2" charset="-78"/>
               </a:rPr>
               <a:t>هَلْ تَقْرَأُ الأَخْبَارَ عَلَى الإِنْتَرْنِتِ؟</a:t>
@@ -23702,6 +23876,7 @@
                   <a:srgbClr val="D4AF37"/>
                 </a:solidFill>
                 <a:latin typeface="Amiri" pitchFamily="2" charset="-78"/>
+                <a:ea typeface="Amiri" pitchFamily="2" charset="-78"/>
                 <a:cs typeface="Amiri" pitchFamily="2" charset="-78"/>
               </a:rPr>
               <a:t>م</a:t>
@@ -24022,6 +24197,7 @@
                   <a:srgbClr val="8A6D1E"/>
                 </a:solidFill>
                 <a:latin typeface="Amiri" pitchFamily="2" charset="-78"/>
+                <a:ea typeface="Amiri" pitchFamily="2" charset="-78"/>
                 <a:cs typeface="Amiri" pitchFamily="2" charset="-78"/>
               </a:rPr>
               <a:t>نَمُوذَجُ الإِجَابَةِ</a:t>
@@ -24264,6 +24440,7 @@
                   <a:srgbClr val="1B3B6F"/>
                 </a:solidFill>
                 <a:latin typeface="Amiri" pitchFamily="2" charset="-78"/>
+                <a:ea typeface="Amiri" pitchFamily="2" charset="-78"/>
                 <a:cs typeface="Amiri" pitchFamily="2" charset="-78"/>
               </a:rPr>
               <a:t>أَبْحَثُ عَنِ المَعْلُومَاتِ لِلْمَشَارِيعِ، وَأُشَاهِدُ دُرُوسًا قَصِيرَةً عِنْدَمَا لَا أَفْهَمُ شَيْئًا.</a:t>
@@ -24340,6 +24517,7 @@
                   <a:srgbClr val="1B3B6F"/>
                 </a:solidFill>
                 <a:latin typeface="Amiri" pitchFamily="2" charset="-78"/>
+                <a:ea typeface="Amiri" pitchFamily="2" charset="-78"/>
                 <a:cs typeface="Amiri" pitchFamily="2" charset="-78"/>
               </a:rPr>
               <a:t>كَيْفَ تَسْتَخْدِمُ الإِنْتَرْنِتَ فِي الدِّرَاسَةِ؟</a:t>
@@ -24443,6 +24621,7 @@
                   <a:srgbClr val="1B3B6F"/>
                 </a:solidFill>
                 <a:latin typeface="Amiri" pitchFamily="2" charset="-78"/>
+                <a:ea typeface="Amiri" pitchFamily="2" charset="-78"/>
                 <a:cs typeface="Amiri" pitchFamily="2" charset="-78"/>
               </a:rPr>
               <a:t>أَرَاهَا مُفِيدَةً لِلتَّوَاصُلِ وَمَعْرِفَةِ الأَخْبَارِ، لٰكِنَّهَا تُضَيِّعُ الوَقْتَ إِذَا لَمْ نَنْتَبِهْ.</a:t>
@@ -24519,6 +24698,7 @@
                   <a:srgbClr val="1B3B6F"/>
                 </a:solidFill>
                 <a:latin typeface="Amiri" pitchFamily="2" charset="-78"/>
+                <a:ea typeface="Amiri" pitchFamily="2" charset="-78"/>
                 <a:cs typeface="Amiri" pitchFamily="2" charset="-78"/>
               </a:rPr>
               <a:t>مَا رَأْيُكَ فِي وَسَائِلِ التَّوَاصُلِ الاجْتِمَاعِيِّ؟</a:t>
@@ -24622,6 +24802,7 @@
                   <a:srgbClr val="1B3B6F"/>
                 </a:solidFill>
                 <a:latin typeface="Amiri" pitchFamily="2" charset="-78"/>
+                <a:ea typeface="Amiri" pitchFamily="2" charset="-78"/>
                 <a:cs typeface="Amiri" pitchFamily="2" charset="-78"/>
               </a:rPr>
               <a:t>كَانُوا يَكْتُبُونَ الرَّسَائِلَ وَيَتَّصِلُونَ مِنَ الهَاتِفِ الأَرْضِيِّ، أَمَّا نَحْنُ فَنُرْسِلُ رِسَالَةً صَوْتِيَّةً فِي ثَانِيَةٍ.</a:t>
@@ -24698,6 +24879,7 @@
                   <a:srgbClr val="1B3B6F"/>
                 </a:solidFill>
                 <a:latin typeface="Amiri" pitchFamily="2" charset="-78"/>
+                <a:ea typeface="Amiri" pitchFamily="2" charset="-78"/>
                 <a:cs typeface="Amiri" pitchFamily="2" charset="-78"/>
               </a:rPr>
               <a:t>كَيْفَ كَانَ التَّوَاصُلُ فِي أَيَّامِ وَالِدَيْكَ؟</a:t>
@@ -24801,6 +24983,7 @@
                   <a:srgbClr val="1B3B6F"/>
                 </a:solidFill>
                 <a:latin typeface="Amiri" pitchFamily="2" charset="-78"/>
+                <a:ea typeface="Amiri" pitchFamily="2" charset="-78"/>
                 <a:cs typeface="Amiri" pitchFamily="2" charset="-78"/>
               </a:rPr>
               <a:t>لَا أَنْشُرُ عُنْوَانِي أَوْ رَقْمَ هَاتِفِي، وَأَسْتَخْدِمُ كَلِمَاتِ سِرٍّ قَوِيَّةً.</a:t>
@@ -24877,6 +25060,7 @@
                   <a:srgbClr val="1B3B6F"/>
                 </a:solidFill>
                 <a:latin typeface="Amiri" pitchFamily="2" charset="-78"/>
+                <a:ea typeface="Amiri" pitchFamily="2" charset="-78"/>
                 <a:cs typeface="Amiri" pitchFamily="2" charset="-78"/>
               </a:rPr>
               <a:t>كَيْفَ تَحْمِي نَفْسَكَ عَلَى الإِنْتَرْنِتِ؟</a:t>
@@ -24980,6 +25164,7 @@
                   <a:srgbClr val="1B3B6F"/>
                 </a:solidFill>
                 <a:latin typeface="Amiri" pitchFamily="2" charset="-78"/>
+                <a:ea typeface="Amiri" pitchFamily="2" charset="-78"/>
                 <a:cs typeface="Amiri" pitchFamily="2" charset="-78"/>
               </a:rPr>
               <a:t>مَرَّةً ضِعْتُ فِي مَدِينَةٍ جَدِيدَةٍ، فَسَاعَدَنِي تَطْبِيقُ الخَرَائِطِ عَلَى الوُصُولِ إِلَى الفُنْدُقِ.</a:t>
@@ -25056,6 +25241,7 @@
                   <a:srgbClr val="1B3B6F"/>
                 </a:solidFill>
                 <a:latin typeface="Amiri" pitchFamily="2" charset="-78"/>
+                <a:ea typeface="Amiri" pitchFamily="2" charset="-78"/>
                 <a:cs typeface="Amiri" pitchFamily="2" charset="-78"/>
               </a:rPr>
               <a:t>صِفْ مَرَّةً سَاعَدَتْكَ فِيهَا التِّكْنُولُوجْيَا.</a:t>
@@ -25265,6 +25451,7 @@
                   <a:srgbClr val="D4AF37"/>
                 </a:solidFill>
                 <a:latin typeface="Amiri" pitchFamily="2" charset="-78"/>
+                <a:ea typeface="Amiri" pitchFamily="2" charset="-78"/>
                 <a:cs typeface="Amiri" pitchFamily="2" charset="-78"/>
               </a:rPr>
               <a:t>م</a:t>
@@ -25585,6 +25772,7 @@
                   <a:srgbClr val="8A6D1E"/>
                 </a:solidFill>
                 <a:latin typeface="Amiri" pitchFamily="2" charset="-78"/>
+                <a:ea typeface="Amiri" pitchFamily="2" charset="-78"/>
                 <a:cs typeface="Amiri" pitchFamily="2" charset="-78"/>
               </a:rPr>
               <a:t>نَمُوذَجُ الإِجَابَةِ</a:t>
@@ -25830,6 +26018,7 @@
                   <a:srgbClr val="1B3B6F"/>
                 </a:solidFill>
                 <a:latin typeface="Amiri" pitchFamily="2" charset="-78"/>
+                <a:ea typeface="Amiri" pitchFamily="2" charset="-78"/>
                 <a:cs typeface="Amiri" pitchFamily="2" charset="-78"/>
               </a:rPr>
               <a:t>مِنْ نَاحِيَةٍ، قَرَّبَتِ البَعِيدَ؛ فَأَرَى جَدَّتِي فِي المَغْرِبِ كُلَّ أُسْبُوعٍ، وَمِنْ نَاحِيَةٍ أُخْرَى، أَبْعَدَتِ القَرِيبَ؛ فَقَدْ يَجْلِسُ أَفْرَادُ الأُسْرَةِ مَعًا وَكُلٌّ مِنْهُمْ يَنْظُرُ إِلَى شَاشَتِهِ.</a:t>
@@ -25909,6 +26098,7 @@
                   <a:srgbClr val="1B3B6F"/>
                 </a:solidFill>
                 <a:latin typeface="Amiri" pitchFamily="2" charset="-78"/>
+                <a:ea typeface="Amiri" pitchFamily="2" charset="-78"/>
                 <a:cs typeface="Amiri" pitchFamily="2" charset="-78"/>
               </a:rPr>
               <a:t>هَلْ قَرَّبَتِ التِّكْنُولُوجْيَا بَيْنَ النَّاسِ أَمْ أَبْعَدَتْهُمْ؟</a:t>
@@ -26012,6 +26202,7 @@
                   <a:srgbClr val="1B3B6F"/>
                 </a:solidFill>
                 <a:latin typeface="Amiri" pitchFamily="2" charset="-78"/>
+                <a:ea typeface="Amiri" pitchFamily="2" charset="-78"/>
                 <a:cs typeface="Amiri" pitchFamily="2" charset="-78"/>
               </a:rPr>
               <a:t>أَرَى أَنَّهُ يَجِبُ أَنْ تُمْنَعَ أَثْنَاءَ الحِصَصِ، لِأَنَّهَا تُشَتِّتُ الانْتِبَاهَ، أَمَّا فِي الاسْتِرَاحَةِ فَيُمْكِنُ السَّمَاحُ بِهَا.</a:t>
@@ -26088,6 +26279,7 @@
                   <a:srgbClr val="1B3B6F"/>
                 </a:solidFill>
                 <a:latin typeface="Amiri" pitchFamily="2" charset="-78"/>
+                <a:ea typeface="Amiri" pitchFamily="2" charset="-78"/>
                 <a:cs typeface="Amiri" pitchFamily="2" charset="-78"/>
               </a:rPr>
               <a:t>هَلْ يَجِبُ أَنْ تُمْنَعَ الهَوَاتِفُ فِي المَدَارِسِ؟</a:t>
@@ -26191,6 +26383,7 @@
                   <a:srgbClr val="1B3B6F"/>
                 </a:solidFill>
                 <a:latin typeface="Amiri" pitchFamily="2" charset="-78"/>
+                <a:ea typeface="Amiri" pitchFamily="2" charset="-78"/>
                 <a:cs typeface="Amiri" pitchFamily="2" charset="-78"/>
               </a:rPr>
               <a:t>أَتَأَكَّدُ مِنْ مَصْدَرِهَا، وَأُقَارِنُهَا بِمَوَاقِعَ مَوْثُوقَةٍ، لِأَنَّ الأَخْبَارَ الكَاذِبَةَ تَنْتَشِرُ أَسْرَعَ مِنَ الصَّحِيحَةِ.</a:t>
@@ -26267,6 +26460,7 @@
                   <a:srgbClr val="1B3B6F"/>
                 </a:solidFill>
                 <a:latin typeface="Amiri" pitchFamily="2" charset="-78"/>
+                <a:ea typeface="Amiri" pitchFamily="2" charset="-78"/>
                 <a:cs typeface="Amiri" pitchFamily="2" charset="-78"/>
               </a:rPr>
               <a:t>كَيْفَ تَعْرِفُ أَنَّ المَعْلُومَةَ عَلَى الإِنْتَرْنِتِ صَحِيحَةٌ؟</a:t>
@@ -26476,6 +26670,7 @@
                   <a:srgbClr val="D4AF37"/>
                 </a:solidFill>
                 <a:latin typeface="Amiri" pitchFamily="2" charset="-78"/>
+                <a:ea typeface="Amiri" pitchFamily="2" charset="-78"/>
                 <a:cs typeface="Amiri" pitchFamily="2" charset="-78"/>
               </a:rPr>
               <a:t>م</a:t>
@@ -26796,6 +26991,7 @@
                   <a:srgbClr val="8A6D1E"/>
                 </a:solidFill>
                 <a:latin typeface="Amiri" pitchFamily="2" charset="-78"/>
+                <a:ea typeface="Amiri" pitchFamily="2" charset="-78"/>
                 <a:cs typeface="Amiri" pitchFamily="2" charset="-78"/>
               </a:rPr>
               <a:t>نَمُوذَجُ الإِجَابَةِ</a:t>
@@ -27038,6 +27234,7 @@
                   <a:srgbClr val="1B3B6F"/>
                 </a:solidFill>
                 <a:latin typeface="Amiri" pitchFamily="2" charset="-78"/>
+                <a:ea typeface="Amiri" pitchFamily="2" charset="-78"/>
                 <a:cs typeface="Amiri" pitchFamily="2" charset="-78"/>
               </a:rPr>
               <a:t>صَحِيحٌ أَنَّ بَعْضَهُمْ يَقْضِي سَاعَاتٍ طَوِيلَةً أَمَامَهَا، غَيْرَ أَنَّ الكِبَارَ لَيْسُوا أَفْضَلَ حَالًا؛ فَأَبِي لَا يَتْرُكُ هَاتِفَهُ حَتَّى فِي العُطْلَةِ!</a:t>
@@ -27114,6 +27311,7 @@
                   <a:srgbClr val="1B3B6F"/>
                 </a:solidFill>
                 <a:latin typeface="Amiri" pitchFamily="2" charset="-78"/>
+                <a:ea typeface="Amiri" pitchFamily="2" charset="-78"/>
                 <a:cs typeface="Amiri" pitchFamily="2" charset="-78"/>
               </a:rPr>
               <a:t>هَلِ الشَّبَابُ مُدْمِنُونَ عَلَى الشَّاشَاتِ؟</a:t>
@@ -27217,6 +27415,7 @@
                   <a:srgbClr val="1B3B6F"/>
                 </a:solidFill>
                 <a:latin typeface="Amiri" pitchFamily="2" charset="-78"/>
+                <a:ea typeface="Amiri" pitchFamily="2" charset="-78"/>
                 <a:cs typeface="Amiri" pitchFamily="2" charset="-78"/>
               </a:rPr>
               <a:t>مِنَ المُتَوَقَّعِ أَنْ نَتَوَاصَلَ عَنْ طَرِيقِ النَّظَّارَاتِ الذَّكِيَّةِ، وَإِذَا لَمْ نَضَعْ حُدُودًا، فَقَدْ نَنْسَى كَيْفَ نَتَحَدَّثُ وَجْهًا لِوَجْهٍ.</a:t>
@@ -27293,6 +27492,7 @@
                   <a:srgbClr val="1B3B6F"/>
                 </a:solidFill>
                 <a:latin typeface="Amiri" pitchFamily="2" charset="-78"/>
+                <a:ea typeface="Amiri" pitchFamily="2" charset="-78"/>
                 <a:cs typeface="Amiri" pitchFamily="2" charset="-78"/>
               </a:rPr>
               <a:t>كَيْفَ سَيَكُونُ التَّوَاصُلُ بَعْدَ عِشْرِينَ سَنَةً؟</a:t>
@@ -27502,6 +27702,7 @@
                   <a:srgbClr val="D4AF37"/>
                 </a:solidFill>
                 <a:latin typeface="Amiri" pitchFamily="2" charset="-78"/>
+                <a:ea typeface="Amiri" pitchFamily="2" charset="-78"/>
                 <a:cs typeface="Amiri" pitchFamily="2" charset="-78"/>
               </a:rPr>
               <a:t>م</a:t>
@@ -27822,6 +28023,7 @@
                   <a:srgbClr val="8A6D1E"/>
                 </a:solidFill>
                 <a:latin typeface="Amiri" pitchFamily="2" charset="-78"/>
+                <a:ea typeface="Amiri" pitchFamily="2" charset="-78"/>
                 <a:cs typeface="Amiri" pitchFamily="2" charset="-78"/>
               </a:rPr>
               <a:t>قَيِّمْ عَمَلَكَ</a:t>
@@ -29066,6 +29268,7 @@
                   <a:srgbClr val="FFFFFF"/>
                 </a:solidFill>
                 <a:latin typeface="Amiri" pitchFamily="2" charset="-78"/>
+                <a:ea typeface="Amiri" pitchFamily="2" charset="-78"/>
                 <a:cs typeface="Amiri" pitchFamily="2" charset="-78"/>
               </a:rPr>
               <a:t>أَحْسَنْتُمْ! إِلَى اللِّقَاءِ</a:t>
@@ -29218,6 +29421,7 @@
                   <a:srgbClr val="D4AF37"/>
                 </a:solidFill>
                 <a:latin typeface="Amiri" pitchFamily="2" charset="-78"/>
+                <a:ea typeface="Amiri" pitchFamily="2" charset="-78"/>
                 <a:cs typeface="Amiri" pitchFamily="2" charset="-78"/>
               </a:rPr>
               <a:t>وَرْشَةُ الكِتَابَةِ</a:t>
@@ -29351,6 +29555,7 @@
                   <a:srgbClr val="D4AF37"/>
                 </a:solidFill>
                 <a:latin typeface="Amiri" pitchFamily="2" charset="-78"/>
+                <a:ea typeface="Amiri" pitchFamily="2" charset="-78"/>
                 <a:cs typeface="Amiri" pitchFamily="2" charset="-78"/>
               </a:rPr>
               <a:t>م</a:t>
@@ -29671,6 +29876,7 @@
                   <a:srgbClr val="8A6D1E"/>
                 </a:solidFill>
                 <a:latin typeface="Amiri" pitchFamily="2" charset="-78"/>
+                <a:ea typeface="Amiri" pitchFamily="2" charset="-78"/>
                 <a:cs typeface="Amiri" pitchFamily="2" charset="-78"/>
               </a:rPr>
               <a:t>خَرِيطَةُ الوَرْشَةِ</a:t>
@@ -29985,6 +30191,7 @@
                   <a:srgbClr val="1B3B6F"/>
                 </a:solidFill>
                 <a:latin typeface="Amiri" pitchFamily="2" charset="-78"/>
+                <a:ea typeface="Amiri" pitchFamily="2" charset="-78"/>
                 <a:cs typeface="Amiri" pitchFamily="2" charset="-78"/>
               </a:rPr>
               <a:t>كَيْفَ</a:t>
@@ -30261,6 +30468,7 @@
                   <a:srgbClr val="1E6B52"/>
                 </a:solidFill>
                 <a:latin typeface="Amiri" pitchFamily="2" charset="-78"/>
+                <a:ea typeface="Amiri" pitchFamily="2" charset="-78"/>
                 <a:cs typeface="Amiri" pitchFamily="2" charset="-78"/>
               </a:rPr>
               <a:t>تَمْثِيلُ الدَّوْرِ</a:t>
@@ -30537,6 +30745,7 @@
                   <a:srgbClr val="8A6D1E"/>
                 </a:solidFill>
                 <a:latin typeface="Amiri" pitchFamily="2" charset="-78"/>
+                <a:ea typeface="Amiri" pitchFamily="2" charset="-78"/>
                 <a:cs typeface="Amiri" pitchFamily="2" charset="-78"/>
               </a:rPr>
               <a:t>النَّمُوذَجُ</a:t>
@@ -30813,6 +31022,7 @@
                   <a:srgbClr val="1E6B52"/>
                 </a:solidFill>
                 <a:latin typeface="Amiri" pitchFamily="2" charset="-78"/>
+                <a:ea typeface="Amiri" pitchFamily="2" charset="-78"/>
                 <a:cs typeface="Amiri" pitchFamily="2" charset="-78"/>
               </a:rPr>
               <a:t>المُحَادَثَةُ</a:t>
@@ -31089,6 +31299,7 @@
                   <a:srgbClr val="8A6D1E"/>
                 </a:solidFill>
                 <a:latin typeface="Amiri" pitchFamily="2" charset="-78"/>
+                <a:ea typeface="Amiri" pitchFamily="2" charset="-78"/>
                 <a:cs typeface="Amiri" pitchFamily="2" charset="-78"/>
               </a:rPr>
               <a:t>قَيِّمْ</a:t>
@@ -31332,6 +31543,7 @@
                   <a:srgbClr val="D4AF37"/>
                 </a:solidFill>
                 <a:latin typeface="Amiri" pitchFamily="2" charset="-78"/>
+                <a:ea typeface="Amiri" pitchFamily="2" charset="-78"/>
                 <a:cs typeface="Amiri" pitchFamily="2" charset="-78"/>
               </a:rPr>
               <a:t>م</a:t>
@@ -31652,6 +31864,7 @@
                   <a:srgbClr val="8A6D1E"/>
                 </a:solidFill>
                 <a:latin typeface="Amiri" pitchFamily="2" charset="-78"/>
+                <a:ea typeface="Amiri" pitchFamily="2" charset="-78"/>
                 <a:cs typeface="Amiri" pitchFamily="2" charset="-78"/>
               </a:rPr>
               <a:t>امْتِحَانُ التَّحَدُّثِ</a:t>
@@ -32276,6 +32489,7 @@
                   <a:srgbClr val="1B3B6F"/>
                 </a:solidFill>
                 <a:latin typeface="Amiri" pitchFamily="2" charset="-78"/>
+                <a:ea typeface="Amiri" pitchFamily="2" charset="-78"/>
                 <a:cs typeface="Amiri" pitchFamily="2" charset="-78"/>
               </a:rPr>
               <a:t>عَفْوًا، هَلْ يُمْكِنُ أَنْ تُعِيدَ السُّؤَالَ؟</a:t>
@@ -32375,6 +32589,7 @@
                   <a:srgbClr val="1B3B6F"/>
                 </a:solidFill>
                 <a:latin typeface="Amiri" pitchFamily="2" charset="-78"/>
+                <a:ea typeface="Amiri" pitchFamily="2" charset="-78"/>
                 <a:cs typeface="Amiri" pitchFamily="2" charset="-78"/>
               </a:rPr>
               <a:t>لَحْظَةً، دَعْنِي أُفَكِّرُ …</a:t>
@@ -32474,6 +32689,7 @@
                   <a:srgbClr val="1B3B6F"/>
                 </a:solidFill>
                 <a:latin typeface="Amiri" pitchFamily="2" charset="-78"/>
+                <a:ea typeface="Amiri" pitchFamily="2" charset="-78"/>
                 <a:cs typeface="Amiri" pitchFamily="2" charset="-78"/>
               </a:rPr>
               <a:t>أَقْصِدُ …</a:t>
@@ -32645,6 +32861,7 @@
                   <a:srgbClr val="D4AF37"/>
                 </a:solidFill>
                 <a:latin typeface="Amiri" pitchFamily="2" charset="-78"/>
+                <a:ea typeface="Amiri" pitchFamily="2" charset="-78"/>
                 <a:cs typeface="Amiri" pitchFamily="2" charset="-78"/>
               </a:rPr>
               <a:t>م</a:t>
@@ -32965,6 +33182,7 @@
                   <a:srgbClr val="8A6D1E"/>
                 </a:solidFill>
                 <a:latin typeface="Amiri" pitchFamily="2" charset="-78"/>
+                <a:ea typeface="Amiri" pitchFamily="2" charset="-78"/>
                 <a:cs typeface="Amiri" pitchFamily="2" charset="-78"/>
               </a:rPr>
               <a:t>الأَجْهِزَةُ وَالتَّطْبِيقَاتُ</a:t>
@@ -33268,6 +33486,7 @@
                   <a:srgbClr val="1B3B6F"/>
                 </a:solidFill>
                 <a:latin typeface="Amiri" pitchFamily="2" charset="-78"/>
+                <a:ea typeface="Amiri" pitchFamily="2" charset="-78"/>
                 <a:cs typeface="Amiri" pitchFamily="2" charset="-78"/>
               </a:rPr>
               <a:t>هَاتِفٌ ذَكِيٌّ</a:t>
@@ -33425,6 +33644,7 @@
                   <a:srgbClr val="1B3B6F"/>
                 </a:solidFill>
                 <a:latin typeface="Amiri" pitchFamily="2" charset="-78"/>
+                <a:ea typeface="Amiri" pitchFamily="2" charset="-78"/>
                 <a:cs typeface="Amiri" pitchFamily="2" charset="-78"/>
               </a:rPr>
               <a:t>شَاشَةٌ · شَاشَاتٌ</a:t>
@@ -33528,6 +33748,7 @@
                   <a:srgbClr val="1B3B6F"/>
                 </a:solidFill>
                 <a:latin typeface="Amiri" pitchFamily="2" charset="-78"/>
+                <a:ea typeface="Amiri" pitchFamily="2" charset="-78"/>
                 <a:cs typeface="Amiri" pitchFamily="2" charset="-78"/>
               </a:rPr>
               <a:t>هَوَاتِفُ ذَكِيَّةٌ</a:t>
@@ -33793,6 +34014,7 @@
                   <a:srgbClr val="1B3B6F"/>
                 </a:solidFill>
                 <a:latin typeface="Amiri" pitchFamily="2" charset="-78"/>
+                <a:ea typeface="Amiri" pitchFamily="2" charset="-78"/>
                 <a:cs typeface="Amiri" pitchFamily="2" charset="-78"/>
               </a:rPr>
               <a:t>تَطْبِيقٌ</a:t>
@@ -33950,6 +34172,7 @@
                   <a:srgbClr val="1B3B6F"/>
                 </a:solidFill>
                 <a:latin typeface="Amiri" pitchFamily="2" charset="-78"/>
+                <a:ea typeface="Amiri" pitchFamily="2" charset="-78"/>
                 <a:cs typeface="Amiri" pitchFamily="2" charset="-78"/>
               </a:rPr>
               <a:t>تَطْبِيقَاتٌ مُفِيدَةٌ</a:t>
@@ -34053,6 +34276,7 @@
                   <a:srgbClr val="1B3B6F"/>
                 </a:solidFill>
                 <a:latin typeface="Amiri" pitchFamily="2" charset="-78"/>
+                <a:ea typeface="Amiri" pitchFamily="2" charset="-78"/>
                 <a:cs typeface="Amiri" pitchFamily="2" charset="-78"/>
               </a:rPr>
               <a:t>تَطْبِيقَاتٌ</a:t>
@@ -34318,6 +34542,7 @@
                   <a:srgbClr val="1B3B6F"/>
                 </a:solidFill>
                 <a:latin typeface="Amiri" pitchFamily="2" charset="-78"/>
+                <a:ea typeface="Amiri" pitchFamily="2" charset="-78"/>
                 <a:cs typeface="Amiri" pitchFamily="2" charset="-78"/>
               </a:rPr>
               <a:t>وَسَائِلُ التَّوَاصُلِ الاجْتِمَاعِيِّ</a:t>
@@ -34475,6 +34700,7 @@
                   <a:srgbClr val="1B3B6F"/>
                 </a:solidFill>
                 <a:latin typeface="Amiri" pitchFamily="2" charset="-78"/>
+                <a:ea typeface="Amiri" pitchFamily="2" charset="-78"/>
                 <a:cs typeface="Amiri" pitchFamily="2" charset="-78"/>
               </a:rPr>
               <a:t>مِنَصَّةٌ · مِنَصَّاتٌ</a:t>
@@ -34740,6 +34966,7 @@
                   <a:srgbClr val="1B3B6F"/>
                 </a:solidFill>
                 <a:latin typeface="Amiri" pitchFamily="2" charset="-78"/>
+                <a:ea typeface="Amiri" pitchFamily="2" charset="-78"/>
                 <a:cs typeface="Amiri" pitchFamily="2" charset="-78"/>
               </a:rPr>
               <a:t>أَتَوَاصَلُ مَعَ …</a:t>
@@ -34897,6 +35124,7 @@
                   <a:srgbClr val="1B3B6F"/>
                 </a:solidFill>
                 <a:latin typeface="Amiri" pitchFamily="2" charset="-78"/>
+                <a:ea typeface="Amiri" pitchFamily="2" charset="-78"/>
                 <a:cs typeface="Amiri" pitchFamily="2" charset="-78"/>
               </a:rPr>
               <a:t>التَّوَاصُلُ</a:t>
@@ -35000,6 +35228,7 @@
                   <a:srgbClr val="1B3B6F"/>
                 </a:solidFill>
                 <a:latin typeface="Amiri" pitchFamily="2" charset="-78"/>
+                <a:ea typeface="Amiri" pitchFamily="2" charset="-78"/>
                 <a:cs typeface="Amiri" pitchFamily="2" charset="-78"/>
               </a:rPr>
               <a:t>تَتَوَاصَلُ مَعَ</a:t>
@@ -35103,6 +35332,7 @@
                   <a:srgbClr val="1B3B6F"/>
                 </a:solidFill>
                 <a:latin typeface="Amiri" pitchFamily="2" charset="-78"/>
+                <a:ea typeface="Amiri" pitchFamily="2" charset="-78"/>
                 <a:cs typeface="Amiri" pitchFamily="2" charset="-78"/>
               </a:rPr>
               <a:t>يَتَوَاصَلُ مَعَ</a:t>
@@ -35368,6 +35598,7 @@
                   <a:srgbClr val="1B3B6F"/>
                 </a:solidFill>
                 <a:latin typeface="Amiri" pitchFamily="2" charset="-78"/>
+                <a:ea typeface="Amiri" pitchFamily="2" charset="-78"/>
                 <a:cs typeface="Amiri" pitchFamily="2" charset="-78"/>
               </a:rPr>
               <a:t>أُعَلِّقُ عَلَى …</a:t>
@@ -35525,6 +35756,7 @@
                   <a:srgbClr val="1B3B6F"/>
                 </a:solidFill>
                 <a:latin typeface="Amiri" pitchFamily="2" charset="-78"/>
+                <a:ea typeface="Amiri" pitchFamily="2" charset="-78"/>
                 <a:cs typeface="Amiri" pitchFamily="2" charset="-78"/>
               </a:rPr>
               <a:t>تَعْلِيقٌ · تَعْلِيقَاتٌ</a:t>
@@ -35628,6 +35860,7 @@
                   <a:srgbClr val="1B3B6F"/>
                 </a:solidFill>
                 <a:latin typeface="Amiri" pitchFamily="2" charset="-78"/>
+                <a:ea typeface="Amiri" pitchFamily="2" charset="-78"/>
                 <a:cs typeface="Amiri" pitchFamily="2" charset="-78"/>
               </a:rPr>
               <a:t>يُعَلِّقُ عَلَى</a:t>
@@ -35893,6 +36126,7 @@
                   <a:srgbClr val="1B3B6F"/>
                 </a:solidFill>
                 <a:latin typeface="Amiri" pitchFamily="2" charset="-78"/>
+                <a:ea typeface="Amiri" pitchFamily="2" charset="-78"/>
                 <a:cs typeface="Amiri" pitchFamily="2" charset="-78"/>
               </a:rPr>
               <a:t>أَتَصَفَّحُ</a:t>
@@ -36050,6 +36284,7 @@
                   <a:srgbClr val="1B3B6F"/>
                 </a:solidFill>
                 <a:latin typeface="Amiri" pitchFamily="2" charset="-78"/>
+                <a:ea typeface="Amiri" pitchFamily="2" charset="-78"/>
                 <a:cs typeface="Amiri" pitchFamily="2" charset="-78"/>
               </a:rPr>
               <a:t>مَوْقِعٌ · مَوَاقِعُ</a:t>
@@ -36153,6 +36388,7 @@
                   <a:srgbClr val="1B3B6F"/>
                 </a:solidFill>
                 <a:latin typeface="Amiri" pitchFamily="2" charset="-78"/>
+                <a:ea typeface="Amiri" pitchFamily="2" charset="-78"/>
                 <a:cs typeface="Amiri" pitchFamily="2" charset="-78"/>
               </a:rPr>
               <a:t>الإِنْتَرْنِتُ</a:t>
@@ -36256,6 +36492,7 @@
                   <a:srgbClr val="1B3B6F"/>
                 </a:solidFill>
                 <a:latin typeface="Amiri" pitchFamily="2" charset="-78"/>
+                <a:ea typeface="Amiri" pitchFamily="2" charset="-78"/>
                 <a:cs typeface="Amiri" pitchFamily="2" charset="-78"/>
               </a:rPr>
               <a:t>يَتَصَفَّحُ</a:t>
@@ -36389,6 +36626,7 @@
                   <a:srgbClr val="D4AF37"/>
                 </a:solidFill>
                 <a:latin typeface="Amiri" pitchFamily="2" charset="-78"/>
+                <a:ea typeface="Amiri" pitchFamily="2" charset="-78"/>
                 <a:cs typeface="Amiri" pitchFamily="2" charset="-78"/>
               </a:rPr>
               <a:t>م</a:t>
@@ -36709,6 +36947,7 @@
                   <a:srgbClr val="8A6D1E"/>
                 </a:solidFill>
                 <a:latin typeface="Amiri" pitchFamily="2" charset="-78"/>
+                <a:ea typeface="Amiri" pitchFamily="2" charset="-78"/>
                 <a:cs typeface="Amiri" pitchFamily="2" charset="-78"/>
               </a:rPr>
               <a:t>الأَفْعَالُ وَحُرُوفُ الجَرِّ</a:t>
@@ -37012,6 +37251,7 @@
                   <a:srgbClr val="1B3B6F"/>
                 </a:solidFill>
                 <a:latin typeface="Amiri" pitchFamily="2" charset="-78"/>
+                <a:ea typeface="Amiri" pitchFamily="2" charset="-78"/>
                 <a:cs typeface="Amiri" pitchFamily="2" charset="-78"/>
               </a:rPr>
               <a:t>أُحَمِّلُ</a:t>
@@ -37169,6 +37409,7 @@
                   <a:srgbClr val="1B3B6F"/>
                 </a:solidFill>
                 <a:latin typeface="Amiri" pitchFamily="2" charset="-78"/>
+                <a:ea typeface="Amiri" pitchFamily="2" charset="-78"/>
                 <a:cs typeface="Amiri" pitchFamily="2" charset="-78"/>
               </a:rPr>
               <a:t>تَحْمِيلٌ</a:t>
@@ -37272,6 +37513,7 @@
                   <a:srgbClr val="1B3B6F"/>
                 </a:solidFill>
                 <a:latin typeface="Amiri" pitchFamily="2" charset="-78"/>
+                <a:ea typeface="Amiri" pitchFamily="2" charset="-78"/>
                 <a:cs typeface="Amiri" pitchFamily="2" charset="-78"/>
               </a:rPr>
               <a:t>يُحَمِّلُ</a:t>
@@ -37537,6 +37779,7 @@
                   <a:srgbClr val="1B3B6F"/>
                 </a:solidFill>
                 <a:latin typeface="Amiri" pitchFamily="2" charset="-78"/>
+                <a:ea typeface="Amiri" pitchFamily="2" charset="-78"/>
                 <a:cs typeface="Amiri" pitchFamily="2" charset="-78"/>
               </a:rPr>
               <a:t>أَنْشُرُ</a:t>
@@ -37694,6 +37937,7 @@
                   <a:srgbClr val="1B3B6F"/>
                 </a:solidFill>
                 <a:latin typeface="Amiri" pitchFamily="2" charset="-78"/>
+                <a:ea typeface="Amiri" pitchFamily="2" charset="-78"/>
                 <a:cs typeface="Amiri" pitchFamily="2" charset="-78"/>
               </a:rPr>
               <a:t>مَنْشُورٌ · مَنْشُورَاتٌ</a:t>
@@ -37797,6 +38041,7 @@
                   <a:srgbClr val="1B3B6F"/>
                 </a:solidFill>
                 <a:latin typeface="Amiri" pitchFamily="2" charset="-78"/>
+                <a:ea typeface="Amiri" pitchFamily="2" charset="-78"/>
                 <a:cs typeface="Amiri" pitchFamily="2" charset="-78"/>
               </a:rPr>
               <a:t>يَنْشُرُ</a:t>
@@ -38062,6 +38307,7 @@
                   <a:srgbClr val="1B3B6F"/>
                 </a:solidFill>
                 <a:latin typeface="Amiri" pitchFamily="2" charset="-78"/>
+                <a:ea typeface="Amiri" pitchFamily="2" charset="-78"/>
                 <a:cs typeface="Amiri" pitchFamily="2" charset="-78"/>
               </a:rPr>
               <a:t>أَبْحَثُ عَنْ …</a:t>
@@ -38219,6 +38465,7 @@
                   <a:srgbClr val="1B3B6F"/>
                 </a:solidFill>
                 <a:latin typeface="Amiri" pitchFamily="2" charset="-78"/>
+                <a:ea typeface="Amiri" pitchFamily="2" charset="-78"/>
                 <a:cs typeface="Amiri" pitchFamily="2" charset="-78"/>
               </a:rPr>
               <a:t>بَحْثٌ</a:t>
@@ -38322,6 +38569,7 @@
                   <a:srgbClr val="1B3B6F"/>
                 </a:solidFill>
                 <a:latin typeface="Amiri" pitchFamily="2" charset="-78"/>
+                <a:ea typeface="Amiri" pitchFamily="2" charset="-78"/>
                 <a:cs typeface="Amiri" pitchFamily="2" charset="-78"/>
               </a:rPr>
               <a:t>يَبْحَثُ عَنْ</a:t>
@@ -38587,6 +38835,7 @@
                   <a:srgbClr val="1B3B6F"/>
                 </a:solidFill>
                 <a:latin typeface="Amiri" pitchFamily="2" charset="-78"/>
+                <a:ea typeface="Amiri" pitchFamily="2" charset="-78"/>
                 <a:cs typeface="Amiri" pitchFamily="2" charset="-78"/>
               </a:rPr>
               <a:t>اسْتِخْدَامٌ</a:t>
@@ -38744,6 +38993,7 @@
                   <a:srgbClr val="1B3B6F"/>
                 </a:solidFill>
                 <a:latin typeface="Amiri" pitchFamily="2" charset="-78"/>
+                <a:ea typeface="Amiri" pitchFamily="2" charset="-78"/>
                 <a:cs typeface="Amiri" pitchFamily="2" charset="-78"/>
               </a:rPr>
               <a:t>الاسْتِخْدَامُ المُفْرِطُ</a:t>
@@ -38847,6 +39097,7 @@
                   <a:srgbClr val="1B3B6F"/>
                 </a:solidFill>
                 <a:latin typeface="Amiri" pitchFamily="2" charset="-78"/>
+                <a:ea typeface="Amiri" pitchFamily="2" charset="-78"/>
                 <a:cs typeface="Amiri" pitchFamily="2" charset="-78"/>
               </a:rPr>
               <a:t>أَسْتَخْدِمُ · يَسْتَخْدِمُ</a:t>
@@ -39112,6 +39363,7 @@
                   <a:srgbClr val="1B3B6F"/>
                 </a:solidFill>
                 <a:latin typeface="Amiri" pitchFamily="2" charset="-78"/>
+                <a:ea typeface="Amiri" pitchFamily="2" charset="-78"/>
                 <a:cs typeface="Amiri" pitchFamily="2" charset="-78"/>
               </a:rPr>
               <a:t>خُصُوصِيَّةٌ · أَمَانٌ</a:t>
@@ -39269,6 +39521,7 @@
                   <a:srgbClr val="1B3B6F"/>
                 </a:solidFill>
                 <a:latin typeface="Amiri" pitchFamily="2" charset="-78"/>
+                <a:ea typeface="Amiri" pitchFamily="2" charset="-78"/>
                 <a:cs typeface="Amiri" pitchFamily="2" charset="-78"/>
               </a:rPr>
               <a:t>كَلِمَةُ السِّرِّ</a:t>
@@ -39372,6 +39625,7 @@
                   <a:srgbClr val="1B3B6F"/>
                 </a:solidFill>
                 <a:latin typeface="Amiri" pitchFamily="2" charset="-78"/>
+                <a:ea typeface="Amiri" pitchFamily="2" charset="-78"/>
                 <a:cs typeface="Amiri" pitchFamily="2" charset="-78"/>
               </a:rPr>
               <a:t>آمِنٌ · آمِنَةٌ</a:t>
@@ -39637,6 +39891,7 @@
                   <a:srgbClr val="1B3B6F"/>
                 </a:solidFill>
                 <a:latin typeface="Amiri" pitchFamily="2" charset="-78"/>
+                <a:ea typeface="Amiri" pitchFamily="2" charset="-78"/>
                 <a:cs typeface="Amiri" pitchFamily="2" charset="-78"/>
               </a:rPr>
               <a:t>إِدْمَانٌ</a:t>
@@ -39794,6 +40049,7 @@
                   <a:srgbClr val="1B3B6F"/>
                 </a:solidFill>
                 <a:latin typeface="Amiri" pitchFamily="2" charset="-78"/>
+                <a:ea typeface="Amiri" pitchFamily="2" charset="-78"/>
                 <a:cs typeface="Amiri" pitchFamily="2" charset="-78"/>
               </a:rPr>
               <a:t>عَلَى الشَّاشَاتِ</a:t>
@@ -39897,6 +40153,7 @@
                   <a:srgbClr val="1B3B6F"/>
                 </a:solidFill>
                 <a:latin typeface="Amiri" pitchFamily="2" charset="-78"/>
+                <a:ea typeface="Amiri" pitchFamily="2" charset="-78"/>
                 <a:cs typeface="Amiri" pitchFamily="2" charset="-78"/>
               </a:rPr>
               <a:t>مُدْمِنٌ · مُدْمِنَةٌ</a:t>
@@ -40030,6 +40287,7 @@
                   <a:srgbClr val="D4AF37"/>
                 </a:solidFill>
                 <a:latin typeface="Amiri" pitchFamily="2" charset="-78"/>
+                <a:ea typeface="Amiri" pitchFamily="2" charset="-78"/>
                 <a:cs typeface="Amiri" pitchFamily="2" charset="-78"/>
               </a:rPr>
               <a:t>م</a:t>
@@ -40350,6 +40608,7 @@
                   <a:srgbClr val="8A6D1E"/>
                 </a:solidFill>
                 <a:latin typeface="Amiri" pitchFamily="2" charset="-78"/>
+                <a:ea typeface="Amiri" pitchFamily="2" charset="-78"/>
                 <a:cs typeface="Amiri" pitchFamily="2" charset="-78"/>
               </a:rPr>
               <a:t>فِي الغُرَفِ</a:t>
@@ -41526,6 +41785,7 @@
                   <a:srgbClr val="1B3B6F"/>
                 </a:solidFill>
                 <a:latin typeface="Amiri" pitchFamily="2" charset="-78"/>
+                <a:ea typeface="Amiri" pitchFamily="2" charset="-78"/>
                 <a:cs typeface="Amiri" pitchFamily="2" charset="-78"/>
               </a:rPr>
               <a:t>دَوْرُكَ!</a:t>
@@ -41602,6 +41862,7 @@
                   <a:srgbClr val="1B3B6F"/>
                 </a:solidFill>
                 <a:latin typeface="Amiri" pitchFamily="2" charset="-78"/>
+                <a:ea typeface="Amiri" pitchFamily="2" charset="-78"/>
                 <a:cs typeface="Amiri" pitchFamily="2" charset="-78"/>
               </a:rPr>
               <a:t>أَحْسَنْتَ! / أَحْسَنْتِ!</a:t>
@@ -41678,6 +41939,7 @@
                   <a:srgbClr val="1B3B6F"/>
                 </a:solidFill>
                 <a:latin typeface="Amiri" pitchFamily="2" charset="-78"/>
+                <a:ea typeface="Amiri" pitchFamily="2" charset="-78"/>
                 <a:cs typeface="Amiri" pitchFamily="2" charset="-78"/>
               </a:rPr>
               <a:t>تَكَلَّمْ أَكْثَرَ، مِنْ فَضْلِكَ</a:t>
@@ -41754,6 +42016,7 @@
                   <a:srgbClr val="1B3B6F"/>
                 </a:solidFill>
                 <a:latin typeface="Amiri" pitchFamily="2" charset="-78"/>
+                <a:ea typeface="Amiri" pitchFamily="2" charset="-78"/>
                 <a:cs typeface="Amiri" pitchFamily="2" charset="-78"/>
               </a:rPr>
               <a:t>لِمَاذَا؟</a:t>
@@ -41925,6 +42188,7 @@
                   <a:srgbClr val="D4AF37"/>
                 </a:solidFill>
                 <a:latin typeface="Amiri" pitchFamily="2" charset="-78"/>
+                <a:ea typeface="Amiri" pitchFamily="2" charset="-78"/>
                 <a:cs typeface="Amiri" pitchFamily="2" charset="-78"/>
               </a:rPr>
               <a:t>م</a:t>
@@ -42245,6 +42509,7 @@
                   <a:srgbClr val="8A6D1E"/>
                 </a:solidFill>
                 <a:latin typeface="Amiri" pitchFamily="2" charset="-78"/>
+                <a:ea typeface="Amiri" pitchFamily="2" charset="-78"/>
                 <a:cs typeface="Amiri" pitchFamily="2" charset="-78"/>
               </a:rPr>
               <a:t>فِي مَحَلِّ الهَوَاتِفِ</a:t>
@@ -42525,6 +42790,7 @@
                   <a:srgbClr val="1B3B6F"/>
                 </a:solidFill>
                 <a:latin typeface="Amiri" pitchFamily="2" charset="-78"/>
+                <a:ea typeface="Amiri" pitchFamily="2" charset="-78"/>
                 <a:cs typeface="Amiri" pitchFamily="2" charset="-78"/>
               </a:rPr>
               <a:t>أُرِيدُ …</a:t>
@@ -42601,6 +42867,7 @@
                   <a:srgbClr val="1B3B6F"/>
                 </a:solidFill>
                 <a:latin typeface="Amiri" pitchFamily="2" charset="-78"/>
+                <a:ea typeface="Amiri" pitchFamily="2" charset="-78"/>
                 <a:cs typeface="Amiri" pitchFamily="2" charset="-78"/>
               </a:rPr>
               <a:t>أَهْلًا! كَيْفَ أُسَاعِدُكَ؟</a:t>
@@ -42769,6 +43036,7 @@
                   <a:srgbClr val="1B3B6F"/>
                 </a:solidFill>
                 <a:latin typeface="Amiri" pitchFamily="2" charset="-78"/>
+                <a:ea typeface="Amiri" pitchFamily="2" charset="-78"/>
                 <a:cs typeface="Amiri" pitchFamily="2" charset="-78"/>
               </a:rPr>
               <a:t>أَسْتَخْدِمُهُ لِلتَّوَاصُلِ مَعَ … وَلِلدِّرَاسَةِ</a:t>
@@ -42845,6 +43113,7 @@
                   <a:srgbClr val="1B3B6F"/>
                 </a:solidFill>
                 <a:latin typeface="Amiri" pitchFamily="2" charset="-78"/>
+                <a:ea typeface="Amiri" pitchFamily="2" charset="-78"/>
                 <a:cs typeface="Amiri" pitchFamily="2" charset="-78"/>
               </a:rPr>
               <a:t>لِمَاذَا تَسْتَخْدِمُ الهَاتِفَ عَادَةً؟</a:t>
@@ -43013,6 +43282,7 @@
                   <a:srgbClr val="1B3B6F"/>
                 </a:solidFill>
                 <a:latin typeface="Amiri" pitchFamily="2" charset="-78"/>
+                <a:ea typeface="Amiri" pitchFamily="2" charset="-78"/>
                 <a:cs typeface="Amiri" pitchFamily="2" charset="-78"/>
               </a:rPr>
               <a:t>نَعَمْ، أَحْتَاجُ إِلَى …</a:t>
@@ -43089,6 +43359,7 @@
                   <a:srgbClr val="1B3B6F"/>
                 </a:solidFill>
                 <a:latin typeface="Amiri" pitchFamily="2" charset="-78"/>
+                <a:ea typeface="Amiri" pitchFamily="2" charset="-78"/>
                 <a:cs typeface="Amiri" pitchFamily="2" charset="-78"/>
               </a:rPr>
               <a:t>هَلْ تُحِبُّ التَّصْوِيرَ؟</a:t>
@@ -43257,6 +43528,7 @@
                   <a:srgbClr val="1B3B6F"/>
                 </a:solidFill>
                 <a:latin typeface="Amiri" pitchFamily="2" charset="-78"/>
+                <a:ea typeface="Amiri" pitchFamily="2" charset="-78"/>
                 <a:cs typeface="Amiri" pitchFamily="2" charset="-78"/>
               </a:rPr>
               <a:t>كَمْ …؟</a:t>
@@ -43333,6 +43605,7 @@
                   <a:srgbClr val="1B3B6F"/>
                 </a:solidFill>
                 <a:latin typeface="Amiri" pitchFamily="2" charset="-78"/>
+                <a:ea typeface="Amiri" pitchFamily="2" charset="-78"/>
                 <a:cs typeface="Amiri" pitchFamily="2" charset="-78"/>
               </a:rPr>
               <a:t>هٰذَا الهَاتِفُ مُمْتَازٌ.</a:t>
@@ -43501,6 +43774,7 @@
                   <a:srgbClr val="1B3B6F"/>
                 </a:solidFill>
                 <a:latin typeface="Amiri" pitchFamily="2" charset="-78"/>
+                <a:ea typeface="Amiri" pitchFamily="2" charset="-78"/>
                 <a:cs typeface="Amiri" pitchFamily="2" charset="-78"/>
               </a:rPr>
               <a:t>أَسْتَخْدِمُهُ … سَاعَاتٍ</a:t>
@@ -43577,6 +43851,7 @@
                   <a:srgbClr val="1B3B6F"/>
                 </a:solidFill>
                 <a:latin typeface="Amiri" pitchFamily="2" charset="-78"/>
+                <a:ea typeface="Amiri" pitchFamily="2" charset="-78"/>
                 <a:cs typeface="Amiri" pitchFamily="2" charset="-78"/>
               </a:rPr>
               <a:t>كَمْ سَاعَةً تَسْتَخْدِمُ الهَاتِفَ كُلَّ يَوْمٍ؟</a:t>
@@ -43851,6 +44126,7 @@
                   <a:srgbClr val="D4AF37"/>
                 </a:solidFill>
                 <a:latin typeface="Amiri" pitchFamily="2" charset="-78"/>
+                <a:ea typeface="Amiri" pitchFamily="2" charset="-78"/>
                 <a:cs typeface="Amiri" pitchFamily="2" charset="-78"/>
               </a:rPr>
               <a:t>م</a:t>
@@ -44171,6 +44447,7 @@
                   <a:srgbClr val="8A6D1E"/>
                 </a:solidFill>
                 <a:latin typeface="Amiri" pitchFamily="2" charset="-78"/>
+                <a:ea typeface="Amiri" pitchFamily="2" charset="-78"/>
                 <a:cs typeface="Amiri" pitchFamily="2" charset="-78"/>
               </a:rPr>
               <a:t>الهَاتِفُ عَلَى المَائِدَةِ</a:t>
@@ -44451,6 +44728,7 @@
                   <a:srgbClr val="1B3B6F"/>
                 </a:solidFill>
                 <a:latin typeface="Amiri" pitchFamily="2" charset="-78"/>
+                <a:ea typeface="Amiri" pitchFamily="2" charset="-78"/>
                 <a:cs typeface="Amiri" pitchFamily="2" charset="-78"/>
               </a:rPr>
               <a:t>أَتَوَاصَلُ مَعَ … / أَبْحَثُ عَنْ …</a:t>
@@ -44527,6 +44805,7 @@
                   <a:srgbClr val="1B3B6F"/>
                 </a:solidFill>
                 <a:latin typeface="Amiri" pitchFamily="2" charset="-78"/>
+                <a:ea typeface="Amiri" pitchFamily="2" charset="-78"/>
                 <a:cs typeface="Amiri" pitchFamily="2" charset="-78"/>
               </a:rPr>
               <a:t>لِمَاذَا تَنْظُرُ إِلَى هَاتِفِكَ طُولَ الوَقْتِ؟</a:t>
@@ -44695,6 +44974,7 @@
                   <a:srgbClr val="1B3B6F"/>
                 </a:solidFill>
                 <a:latin typeface="Amiri" pitchFamily="2" charset="-78"/>
+                <a:ea typeface="Amiri" pitchFamily="2" charset="-78"/>
                 <a:cs typeface="Amiri" pitchFamily="2" charset="-78"/>
               </a:rPr>
               <a:t>هٰذِهِ فِكْرَةٌ … لِأَنَّ …</a:t>
@@ -44771,6 +45051,7 @@
                   <a:srgbClr val="1B3B6F"/>
                 </a:solidFill>
                 <a:latin typeface="Amiri" pitchFamily="2" charset="-78"/>
+                <a:ea typeface="Amiri" pitchFamily="2" charset="-78"/>
                 <a:cs typeface="Amiri" pitchFamily="2" charset="-78"/>
               </a:rPr>
               <a:t>مِنَ اليَوْمِ: لَا هَوَاتِفَ عَلَى المَائِدَةِ!</a:t>
@@ -44939,6 +45220,7 @@
                   <a:srgbClr val="1B3B6F"/>
                 </a:solidFill>
                 <a:latin typeface="Amiri" pitchFamily="2" charset="-78"/>
+                <a:ea typeface="Amiri" pitchFamily="2" charset="-78"/>
                 <a:cs typeface="Amiri" pitchFamily="2" charset="-78"/>
               </a:rPr>
               <a:t>هَلْ يُمْكِنُ أَنْ …؟</a:t>
@@ -45015,6 +45297,7 @@
                   <a:srgbClr val="1B3B6F"/>
                 </a:solidFill>
                 <a:latin typeface="Amiri" pitchFamily="2" charset="-78"/>
+                <a:ea typeface="Amiri" pitchFamily="2" charset="-78"/>
                 <a:cs typeface="Amiri" pitchFamily="2" charset="-78"/>
               </a:rPr>
               <a:t>وَأَنْتَ تَسْهَرُ عَلَى الهَاتِفِ أَيْضًا.</a:t>
@@ -45118,6 +45401,7 @@
                   <a:srgbClr val="1B3B6F"/>
                 </a:solidFill>
                 <a:latin typeface="Amiri" pitchFamily="2" charset="-78"/>
+                <a:ea typeface="Amiri" pitchFamily="2" charset="-78"/>
                 <a:cs typeface="Amiri" pitchFamily="2" charset="-78"/>
               </a:rPr>
               <a:t>لِمُرَاجَعَةِ … وَلِلتَّوَاصُلِ مَعَ …</a:t>
@@ -45194,6 +45478,7 @@
                   <a:srgbClr val="1B3B6F"/>
                 </a:solidFill>
                 <a:latin typeface="Amiri" pitchFamily="2" charset="-78"/>
+                <a:ea typeface="Amiri" pitchFamily="2" charset="-78"/>
                 <a:cs typeface="Amiri" pitchFamily="2" charset="-78"/>
               </a:rPr>
               <a:t>لِمَاذَا تَحْتَاجُ إِلَيْهِ فِي المَسَاءِ؟</a:t>
@@ -45297,6 +45582,7 @@
                   <a:srgbClr val="1B3B6F"/>
                 </a:solidFill>
                 <a:latin typeface="Amiri" pitchFamily="2" charset="-78"/>
+                <a:ea typeface="Amiri" pitchFamily="2" charset="-78"/>
                 <a:cs typeface="Amiri" pitchFamily="2" charset="-78"/>
               </a:rPr>
               <a:t>أَمْسِ … وَ…</a:t>
@@ -45373,6 +45659,7 @@
                   <a:srgbClr val="1B3B6F"/>
                 </a:solidFill>
                 <a:latin typeface="Amiri" pitchFamily="2" charset="-78"/>
+                <a:ea typeface="Amiri" pitchFamily="2" charset="-78"/>
                 <a:cs typeface="Amiri" pitchFamily="2" charset="-78"/>
               </a:rPr>
               <a:t>مَاذَا فَعَلْتَ عَلَى الهَاتِفِ أَمْسِ؟</a:t>
@@ -45547,13 +45834,9 @@
     <a:fontScheme name="Office">
       <a:majorFont>
         <a:latin typeface="Calibri Light" panose="020F0302020204030204"/>
-        <a:ea typeface=""/>
-        <a:cs typeface=""/>
-        <a:font script="Jpan" typeface="游ゴシック Light"/>
-        <a:font script="Hang" typeface="맑은 고딕"/>
-        <a:font script="Hans" typeface="等线 Light"/>
-        <a:font script="Hant" typeface="新細明體"/>
-        <a:font script="Arab" typeface="Times New Roman"/>
+        <a:ea typeface="Amiri" pitchFamily="2" charset="-78"/>
+        <a:cs typeface="Amiri" pitchFamily="2" charset="-78"/>
+        <a:font script="Arab" typeface="Amiri"/>
         <a:font script="Hebr" typeface="Times New Roman"/>
         <a:font script="Thai" typeface="Angsana New"/>
         <a:font script="Ethi" typeface="Nyala"/>
@@ -45599,13 +45882,9 @@
       </a:majorFont>
       <a:minorFont>
         <a:latin typeface="Calibri" panose="020F0502020204030204"/>
-        <a:ea typeface=""/>
-        <a:cs typeface=""/>
-        <a:font script="Jpan" typeface="游ゴシック"/>
-        <a:font script="Hang" typeface="맑은 고딕"/>
-        <a:font script="Hans" typeface="等线"/>
-        <a:font script="Hant" typeface="新細明體"/>
-        <a:font script="Arab" typeface="Arial"/>
+        <a:ea typeface="Amiri" pitchFamily="2" charset="-78"/>
+        <a:cs typeface="Amiri" pitchFamily="2" charset="-78"/>
+        <a:font script="Arab" typeface="Amiri"/>
         <a:font script="Hebr" typeface="Arial"/>
         <a:font script="Thai" typeface="Cordia New"/>
         <a:font script="Ethi" typeface="Nyala"/>
